--- a/insights/260807-CoC-KN/awesome-agentic-landscape/awesome_agentic_landscape_readable_2026.pptx
+++ b/insights/260807-CoC-KN/awesome-agentic-landscape/awesome_agentic_landscape_readable_2026.pptx
@@ -2,15 +2,15 @@
 <file path=ppt/presentation.xml><?xml version="1.0" encoding="utf-8"?>
 <p:presentation xmlns:p="http://schemas.openxmlformats.org/presentationml/2006/main">
   <p:sldMasterIdLst>
-    <p:sldMasterId xmlns:r="http://schemas.openxmlformats.org/officeDocument/2006/relationships" id="2147483648" r:id="R78ca524914534efa"/>
+    <p:sldMasterId xmlns:r="http://schemas.openxmlformats.org/officeDocument/2006/relationships" id="2147483648" r:id="Ra2fda623b87c4c9f"/>
   </p:sldMasterIdLst>
   <p:notesMasterIdLst>
-    <p:notesMasterId xmlns:r="http://schemas.openxmlformats.org/officeDocument/2006/relationships" r:id="Rfe28db2cc65549c1"/>
+    <p:notesMasterId xmlns:r="http://schemas.openxmlformats.org/officeDocument/2006/relationships" r:id="Rdc69e7e117654962"/>
   </p:notesMasterIdLst>
   <p:sldIdLst>
-    <p:sldId xmlns:r="http://schemas.openxmlformats.org/officeDocument/2006/relationships" id="256" r:id="R3393f9a98d694d84"/>
-    <p:sldId xmlns:r="http://schemas.openxmlformats.org/officeDocument/2006/relationships" id="257" r:id="Re99d2cb7a0204fd6"/>
-    <p:sldId xmlns:r="http://schemas.openxmlformats.org/officeDocument/2006/relationships" id="258" r:id="R674d5f7862d541b9"/>
+    <p:sldId xmlns:r="http://schemas.openxmlformats.org/officeDocument/2006/relationships" id="256" r:id="R3a97ff0e99f249ca"/>
+    <p:sldId xmlns:r="http://schemas.openxmlformats.org/officeDocument/2006/relationships" id="257" r:id="Re2163cc0fb6c49e4"/>
+    <p:sldId xmlns:r="http://schemas.openxmlformats.org/officeDocument/2006/relationships" id="258" r:id="R3aa26fc3c6254346"/>
   </p:sldIdLst>
   <p:sldSz cx="12192000" cy="6858000"/>
   <p:notesSz cx="6858000" cy="9144000"/>
@@ -202,14 +202,14 @@
     </a:clrScheme>
     <a:fontScheme name="Office">
       <a:majorFont>
-        <a:latin typeface="Calibri Light"/>
-        <a:ea typeface="Calibri Light"/>
-        <a:cs typeface="Calibri Light"/>
+        <a:latin typeface="Alibaba PuHuiTi"/>
+        <a:ea typeface="Alibaba PuHuiTi"/>
+        <a:cs typeface="Alibaba PuHuiTi"/>
       </a:majorFont>
       <a:minorFont>
-        <a:latin typeface="Calibri"/>
-        <a:ea typeface="Calibri"/>
-        <a:cs typeface="Calibri"/>
+        <a:latin typeface="Alibaba PuHuiTi"/>
+        <a:ea typeface="Alibaba PuHuiTi"/>
+        <a:cs typeface="Alibaba PuHuiTi"/>
       </a:minorFont>
     </a:fontScheme>
     <a:fmtScheme name="ChatGPT">
@@ -807,7 +807,7 @@
   </p:cSld>
   <p:clrMap bg1="lt1" tx1="dk1" bg2="lt2" tx2="dk2" accent1="accent1" accent2="accent2" accent3="accent3" accent4="accent4" accent5="accent5" accent6="accent6" hlink="hlink" folHlink="folHlink"/>
   <p:sldLayoutIdLst>
-    <p:sldLayoutId xmlns:r="http://schemas.openxmlformats.org/officeDocument/2006/relationships" id="2147483649" r:id="Rd32da1cd084a4b70"/>
+    <p:sldLayoutId xmlns:r="http://schemas.openxmlformats.org/officeDocument/2006/relationships" id="2147483649" r:id="R9ba27209af674bb0"/>
   </p:sldLayoutIdLst>
   <p:txStyles>
     <p:titleStyle>
@@ -823,9 +823,9 @@
           <a:solidFill>
             <a:schemeClr val="tx1"/>
           </a:solidFill>
-          <a:latin typeface="+mj-lt"/>
-          <a:ea typeface="+mj-lt"/>
-          <a:cs typeface="+mj-lt"/>
+          <a:latin typeface="Alibaba PuHuiTi"/>
+          <a:ea typeface="Alibaba PuHuiTi"/>
+          <a:cs typeface="Alibaba PuHuiTi"/>
         </a:defRPr>
       </a:lvl1pPr>
     </p:titleStyle>
@@ -842,9 +842,9 @@
           <a:solidFill>
             <a:schemeClr val="tx1"/>
           </a:solidFill>
-          <a:latin typeface="+mn-lt"/>
-          <a:ea typeface="+mn-lt"/>
-          <a:cs typeface="+mn-lt"/>
+          <a:latin typeface="Alibaba PuHuiTi"/>
+          <a:ea typeface="Alibaba PuHuiTi"/>
+          <a:cs typeface="Alibaba PuHuiTi"/>
         </a:defRPr>
       </a:lvl1pPr>
       <a:lvl2pPr xmlns:a="http://schemas.openxmlformats.org/drawingml/2006/main" marL="685800" indent="-228600" algn="l">
@@ -859,9 +859,9 @@
           <a:solidFill>
             <a:schemeClr val="tx1"/>
           </a:solidFill>
-          <a:latin typeface="+mn-lt"/>
-          <a:ea typeface="+mn-lt"/>
-          <a:cs typeface="+mn-lt"/>
+          <a:latin typeface="Alibaba PuHuiTi"/>
+          <a:ea typeface="Alibaba PuHuiTi"/>
+          <a:cs typeface="Alibaba PuHuiTi"/>
         </a:defRPr>
       </a:lvl2pPr>
       <a:lvl3pPr xmlns:a="http://schemas.openxmlformats.org/drawingml/2006/main" marL="1143000" indent="-228600" algn="l">
@@ -876,9 +876,9 @@
           <a:solidFill>
             <a:schemeClr val="tx1"/>
           </a:solidFill>
-          <a:latin typeface="+mn-lt"/>
-          <a:ea typeface="+mn-lt"/>
-          <a:cs typeface="+mn-lt"/>
+          <a:latin typeface="Alibaba PuHuiTi"/>
+          <a:ea typeface="Alibaba PuHuiTi"/>
+          <a:cs typeface="Alibaba PuHuiTi"/>
         </a:defRPr>
       </a:lvl3pPr>
       <a:lvl4pPr xmlns:a="http://schemas.openxmlformats.org/drawingml/2006/main" marL="1600200" indent="-228600" algn="l">
@@ -893,9 +893,9 @@
           <a:solidFill>
             <a:schemeClr val="tx1"/>
           </a:solidFill>
-          <a:latin typeface="+mn-lt"/>
-          <a:ea typeface="+mn-lt"/>
-          <a:cs typeface="+mn-lt"/>
+          <a:latin typeface="Alibaba PuHuiTi"/>
+          <a:ea typeface="Alibaba PuHuiTi"/>
+          <a:cs typeface="Alibaba PuHuiTi"/>
         </a:defRPr>
       </a:lvl4pPr>
       <a:lvl5pPr xmlns:a="http://schemas.openxmlformats.org/drawingml/2006/main" marL="2057400" indent="-228600" algn="l">
@@ -910,9 +910,9 @@
           <a:solidFill>
             <a:schemeClr val="tx1"/>
           </a:solidFill>
-          <a:latin typeface="+mn-lt"/>
-          <a:ea typeface="+mn-lt"/>
-          <a:cs typeface="+mn-lt"/>
+          <a:latin typeface="Alibaba PuHuiTi"/>
+          <a:ea typeface="Alibaba PuHuiTi"/>
+          <a:cs typeface="Alibaba PuHuiTi"/>
         </a:defRPr>
       </a:lvl5pPr>
       <a:lvl6pPr xmlns:a="http://schemas.openxmlformats.org/drawingml/2006/main" marL="2514600" indent="-228600" algn="l">
@@ -927,9 +927,9 @@
           <a:solidFill>
             <a:schemeClr val="tx1"/>
           </a:solidFill>
-          <a:latin typeface="+mn-lt"/>
-          <a:ea typeface="+mn-lt"/>
-          <a:cs typeface="+mn-lt"/>
+          <a:latin typeface="Alibaba PuHuiTi"/>
+          <a:ea typeface="Alibaba PuHuiTi"/>
+          <a:cs typeface="Alibaba PuHuiTi"/>
         </a:defRPr>
       </a:lvl6pPr>
       <a:lvl7pPr xmlns:a="http://schemas.openxmlformats.org/drawingml/2006/main" marL="2971800" indent="-228600" algn="l">
@@ -944,9 +944,9 @@
           <a:solidFill>
             <a:schemeClr val="tx1"/>
           </a:solidFill>
-          <a:latin typeface="+mn-lt"/>
-          <a:ea typeface="+mn-lt"/>
-          <a:cs typeface="+mn-lt"/>
+          <a:latin typeface="Alibaba PuHuiTi"/>
+          <a:ea typeface="Alibaba PuHuiTi"/>
+          <a:cs typeface="Alibaba PuHuiTi"/>
         </a:defRPr>
       </a:lvl7pPr>
       <a:lvl8pPr xmlns:a="http://schemas.openxmlformats.org/drawingml/2006/main" marL="3429000" indent="-228600" algn="l">
@@ -961,9 +961,9 @@
           <a:solidFill>
             <a:schemeClr val="tx1"/>
           </a:solidFill>
-          <a:latin typeface="+mn-lt"/>
-          <a:ea typeface="+mn-lt"/>
-          <a:cs typeface="+mn-lt"/>
+          <a:latin typeface="Alibaba PuHuiTi"/>
+          <a:ea typeface="Alibaba PuHuiTi"/>
+          <a:cs typeface="Alibaba PuHuiTi"/>
         </a:defRPr>
       </a:lvl8pPr>
       <a:lvl9pPr xmlns:a="http://schemas.openxmlformats.org/drawingml/2006/main" marL="3886200" indent="-228600" algn="l">
@@ -978,9 +978,9 @@
           <a:solidFill>
             <a:schemeClr val="tx1"/>
           </a:solidFill>
-          <a:latin typeface="+mn-lt"/>
-          <a:ea typeface="+mn-lt"/>
-          <a:cs typeface="+mn-lt"/>
+          <a:latin typeface="Alibaba PuHuiTi"/>
+          <a:ea typeface="Alibaba PuHuiTi"/>
+          <a:cs typeface="Alibaba PuHuiTi"/>
         </a:defRPr>
       </a:lvl9pPr>
     </p:bodyStyle>
@@ -991,9 +991,9 @@
           <a:solidFill>
             <a:schemeClr val="tx1"/>
           </a:solidFill>
-          <a:latin typeface="+mn-lt"/>
-          <a:ea typeface="+mn-lt"/>
-          <a:cs typeface="+mn-lt"/>
+          <a:latin typeface="Alibaba PuHuiTi"/>
+          <a:ea typeface="Alibaba PuHuiTi"/>
+          <a:cs typeface="Alibaba PuHuiTi"/>
         </a:defRPr>
       </a:lvl1pPr>
       <a:lvl2pPr xmlns:a="http://schemas.openxmlformats.org/drawingml/2006/main" marL="457200" algn="l">
@@ -1002,9 +1002,9 @@
           <a:solidFill>
             <a:schemeClr val="tx1"/>
           </a:solidFill>
-          <a:latin typeface="+mn-lt"/>
-          <a:ea typeface="+mn-lt"/>
-          <a:cs typeface="+mn-lt"/>
+          <a:latin typeface="Alibaba PuHuiTi"/>
+          <a:ea typeface="Alibaba PuHuiTi"/>
+          <a:cs typeface="Alibaba PuHuiTi"/>
         </a:defRPr>
       </a:lvl2pPr>
       <a:lvl3pPr xmlns:a="http://schemas.openxmlformats.org/drawingml/2006/main" marL="914400" algn="l">
@@ -1013,9 +1013,9 @@
           <a:solidFill>
             <a:schemeClr val="tx1"/>
           </a:solidFill>
-          <a:latin typeface="+mn-lt"/>
-          <a:ea typeface="+mn-lt"/>
-          <a:cs typeface="+mn-lt"/>
+          <a:latin typeface="Alibaba PuHuiTi"/>
+          <a:ea typeface="Alibaba PuHuiTi"/>
+          <a:cs typeface="Alibaba PuHuiTi"/>
         </a:defRPr>
       </a:lvl3pPr>
       <a:lvl4pPr xmlns:a="http://schemas.openxmlformats.org/drawingml/2006/main" marL="1371600" algn="l">
@@ -1024,9 +1024,9 @@
           <a:solidFill>
             <a:schemeClr val="tx1"/>
           </a:solidFill>
-          <a:latin typeface="+mn-lt"/>
-          <a:ea typeface="+mn-lt"/>
-          <a:cs typeface="+mn-lt"/>
+          <a:latin typeface="Alibaba PuHuiTi"/>
+          <a:ea typeface="Alibaba PuHuiTi"/>
+          <a:cs typeface="Alibaba PuHuiTi"/>
         </a:defRPr>
       </a:lvl4pPr>
       <a:lvl5pPr xmlns:a="http://schemas.openxmlformats.org/drawingml/2006/main" marL="1828800" algn="l">
@@ -1035,9 +1035,9 @@
           <a:solidFill>
             <a:schemeClr val="tx1"/>
           </a:solidFill>
-          <a:latin typeface="+mn-lt"/>
-          <a:ea typeface="+mn-lt"/>
-          <a:cs typeface="+mn-lt"/>
+          <a:latin typeface="Alibaba PuHuiTi"/>
+          <a:ea typeface="Alibaba PuHuiTi"/>
+          <a:cs typeface="Alibaba PuHuiTi"/>
         </a:defRPr>
       </a:lvl5pPr>
       <a:lvl6pPr xmlns:a="http://schemas.openxmlformats.org/drawingml/2006/main" marL="2286000" algn="l">
@@ -1046,9 +1046,9 @@
           <a:solidFill>
             <a:schemeClr val="tx1"/>
           </a:solidFill>
-          <a:latin typeface="+mn-lt"/>
-          <a:ea typeface="+mn-lt"/>
-          <a:cs typeface="+mn-lt"/>
+          <a:latin typeface="Alibaba PuHuiTi"/>
+          <a:ea typeface="Alibaba PuHuiTi"/>
+          <a:cs typeface="Alibaba PuHuiTi"/>
         </a:defRPr>
       </a:lvl6pPr>
       <a:lvl7pPr xmlns:a="http://schemas.openxmlformats.org/drawingml/2006/main" marL="2743200" algn="l">
@@ -1057,9 +1057,9 @@
           <a:solidFill>
             <a:schemeClr val="tx1"/>
           </a:solidFill>
-          <a:latin typeface="+mn-lt"/>
-          <a:ea typeface="+mn-lt"/>
-          <a:cs typeface="+mn-lt"/>
+          <a:latin typeface="Alibaba PuHuiTi"/>
+          <a:ea typeface="Alibaba PuHuiTi"/>
+          <a:cs typeface="Alibaba PuHuiTi"/>
         </a:defRPr>
       </a:lvl7pPr>
       <a:lvl8pPr xmlns:a="http://schemas.openxmlformats.org/drawingml/2006/main" marL="3200400" algn="l">
@@ -1068,9 +1068,9 @@
           <a:solidFill>
             <a:schemeClr val="tx1"/>
           </a:solidFill>
-          <a:latin typeface="+mn-lt"/>
-          <a:ea typeface="+mn-lt"/>
-          <a:cs typeface="+mn-lt"/>
+          <a:latin typeface="Alibaba PuHuiTi"/>
+          <a:ea typeface="Alibaba PuHuiTi"/>
+          <a:cs typeface="Alibaba PuHuiTi"/>
         </a:defRPr>
       </a:lvl8pPr>
       <a:lvl9pPr xmlns:a="http://schemas.openxmlformats.org/drawingml/2006/main" marL="3657600" algn="l">
@@ -1079,9 +1079,9 @@
           <a:solidFill>
             <a:schemeClr val="tx1"/>
           </a:solidFill>
-          <a:latin typeface="+mn-lt"/>
-          <a:ea typeface="+mn-lt"/>
-          <a:cs typeface="+mn-lt"/>
+          <a:latin typeface="Alibaba PuHuiTi"/>
+          <a:ea typeface="Alibaba PuHuiTi"/>
+          <a:cs typeface="Alibaba PuHuiTi"/>
         </a:defRPr>
       </a:lvl9pPr>
     </p:otherStyle>
@@ -1132,14 +1132,14 @@
     </a:clrScheme>
     <a:fontScheme name="Office">
       <a:majorFont>
-        <a:latin typeface="Calibri Light"/>
-        <a:ea typeface="Calibri Light"/>
-        <a:cs typeface="Calibri Light"/>
+        <a:latin typeface="Alibaba PuHuiTi"/>
+        <a:ea typeface="Alibaba PuHuiTi"/>
+        <a:cs typeface="Alibaba PuHuiTi"/>
       </a:majorFont>
       <a:minorFont>
-        <a:latin typeface="Calibri"/>
-        <a:ea typeface="Calibri"/>
-        <a:cs typeface="Calibri"/>
+        <a:latin typeface="Alibaba PuHuiTi"/>
+        <a:ea typeface="Alibaba PuHuiTi"/>
+        <a:cs typeface="Alibaba PuHuiTi"/>
       </a:minorFont>
     </a:fontScheme>
     <a:fmtScheme name="ChatGPT">
@@ -1386,13 +1386,14 @@
           <a:lstStyle xmlns:a="http://schemas.openxmlformats.org/drawingml/2006/main"/>
           <a:p xmlns:a="http://schemas.openxmlformats.org/drawingml/2006/main">
             <a:pPr algn="l">
+              <a:buNone/>
               <a:defRPr sz="3750" b="1">
                 <a:solidFill>
                   <a:srgbClr val="101216"/>
                 </a:solidFill>
-                <a:latin typeface="PingFang SC"/>
-                <a:ea typeface="PingFang SC"/>
-                <a:cs typeface="PingFang SC"/>
+                <a:latin typeface="Alibaba PuHuiTi"/>
+                <a:ea typeface="Alibaba PuHuiTi"/>
+                <a:cs typeface="Alibaba PuHuiTi"/>
               </a:defRPr>
             </a:pPr>
             <a:r>
@@ -1400,9 +1401,9 @@
                 <a:solidFill>
                   <a:srgbClr val="101216"/>
                 </a:solidFill>
-                <a:latin typeface="PingFang SC"/>
-                <a:ea typeface="PingFang SC"/>
-                <a:cs typeface="PingFang SC"/>
+                <a:latin typeface="Alibaba PuHuiTi"/>
+                <a:ea typeface="Alibaba PuHuiTi"/>
+                <a:cs typeface="Alibaba PuHuiTi"/>
               </a:rPr>
               <a:t>同样叫 awesome，用法已经分成四种</a:t>
             </a:r>
@@ -1442,13 +1443,14 @@
           <a:lstStyle xmlns:a="http://schemas.openxmlformats.org/drawingml/2006/main"/>
           <a:p xmlns:a="http://schemas.openxmlformats.org/drawingml/2006/main">
             <a:pPr algn="l">
+              <a:buNone/>
               <a:defRPr sz="1725" b="0">
                 <a:solidFill>
                   <a:srgbClr val="59616C"/>
                 </a:solidFill>
-                <a:latin typeface="PingFang SC"/>
-                <a:ea typeface="PingFang SC"/>
-                <a:cs typeface="PingFang SC"/>
+                <a:latin typeface="Alibaba PuHuiTi"/>
+                <a:ea typeface="Alibaba PuHuiTi"/>
+                <a:cs typeface="Alibaba PuHuiTi"/>
               </a:defRPr>
             </a:pPr>
             <a:r>
@@ -1456,9 +1458,9 @@
                 <a:solidFill>
                   <a:srgbClr val="59616C"/>
                 </a:solidFill>
-                <a:latin typeface="PingFang SC"/>
-                <a:ea typeface="PingFang SC"/>
-                <a:cs typeface="PingFang SC"/>
+                <a:latin typeface="Alibaba PuHuiTi"/>
+                <a:ea typeface="Alibaba PuHuiTi"/>
+                <a:cs typeface="Alibaba PuHuiTi"/>
               </a:rPr>
               <a:t>有些仍然给人浏览，有些已经提供文件、安装入口和工程方法。</a:t>
             </a:r>
@@ -1531,13 +1533,14 @@
           <a:lstStyle xmlns:a="http://schemas.openxmlformats.org/drawingml/2006/main"/>
           <a:p xmlns:a="http://schemas.openxmlformats.org/drawingml/2006/main">
             <a:pPr algn="l">
+              <a:buNone/>
               <a:defRPr sz="1350" b="1">
                 <a:solidFill>
                   <a:srgbClr val="C85A3A"/>
                 </a:solidFill>
-                <a:latin typeface="PingFang SC"/>
-                <a:ea typeface="PingFang SC"/>
-                <a:cs typeface="PingFang SC"/>
+                <a:latin typeface="Alibaba PuHuiTi"/>
+                <a:ea typeface="Alibaba PuHuiTi"/>
+                <a:cs typeface="Alibaba PuHuiTi"/>
               </a:defRPr>
             </a:pPr>
             <a:r>
@@ -1545,9 +1548,9 @@
                 <a:solidFill>
                   <a:srgbClr val="C85A3A"/>
                 </a:solidFill>
-                <a:latin typeface="PingFang SC"/>
-                <a:ea typeface="PingFang SC"/>
-                <a:cs typeface="PingFang SC"/>
+                <a:latin typeface="Alibaba PuHuiTi"/>
+                <a:ea typeface="Alibaba PuHuiTi"/>
+                <a:cs typeface="Alibaba PuHuiTi"/>
               </a:rPr>
               <a:t>01</a:t>
             </a:r>
@@ -1587,13 +1590,14 @@
           <a:lstStyle xmlns:a="http://schemas.openxmlformats.org/drawingml/2006/main"/>
           <a:p xmlns:a="http://schemas.openxmlformats.org/drawingml/2006/main">
             <a:pPr algn="l">
+              <a:buNone/>
               <a:defRPr sz="2400" b="1">
                 <a:solidFill>
                   <a:srgbClr val="101216"/>
                 </a:solidFill>
-                <a:latin typeface="PingFang SC"/>
-                <a:ea typeface="PingFang SC"/>
-                <a:cs typeface="PingFang SC"/>
+                <a:latin typeface="Alibaba PuHuiTi"/>
+                <a:ea typeface="Alibaba PuHuiTi"/>
+                <a:cs typeface="Alibaba PuHuiTi"/>
               </a:defRPr>
             </a:pPr>
             <a:r>
@@ -1601,9 +1605,9 @@
                 <a:solidFill>
                   <a:srgbClr val="101216"/>
                 </a:solidFill>
-                <a:latin typeface="PingFang SC"/>
-                <a:ea typeface="PingFang SC"/>
-                <a:cs typeface="PingFang SC"/>
+                <a:latin typeface="Alibaba PuHuiTi"/>
+                <a:ea typeface="Alibaba PuHuiTi"/>
+                <a:cs typeface="Alibaba PuHuiTi"/>
               </a:rPr>
               <a:t>发现</a:t>
             </a:r>
@@ -1643,13 +1647,14 @@
           <a:lstStyle xmlns:a="http://schemas.openxmlformats.org/drawingml/2006/main"/>
           <a:p xmlns:a="http://schemas.openxmlformats.org/drawingml/2006/main">
             <a:pPr algn="l">
+              <a:buNone/>
               <a:defRPr sz="1575" b="0">
                 <a:solidFill>
                   <a:srgbClr val="59616C"/>
                 </a:solidFill>
-                <a:latin typeface="PingFang SC"/>
-                <a:ea typeface="PingFang SC"/>
-                <a:cs typeface="PingFang SC"/>
+                <a:latin typeface="Alibaba PuHuiTi"/>
+                <a:ea typeface="Alibaba PuHuiTi"/>
+                <a:cs typeface="Alibaba PuHuiTi"/>
               </a:defRPr>
             </a:pPr>
             <a:r>
@@ -1657,9 +1662,9 @@
                 <a:solidFill>
                   <a:srgbClr val="59616C"/>
                 </a:solidFill>
-                <a:latin typeface="PingFang SC"/>
-                <a:ea typeface="PingFang SC"/>
-                <a:cs typeface="PingFang SC"/>
+                <a:latin typeface="Alibaba PuHuiTi"/>
+                <a:ea typeface="Alibaba PuHuiTi"/>
+                <a:cs typeface="Alibaba PuHuiTi"/>
               </a:rPr>
               <a:t>人来读，自己挑</a:t>
             </a:r>
@@ -1732,13 +1737,14 @@
           <a:lstStyle xmlns:a="http://schemas.openxmlformats.org/drawingml/2006/main"/>
           <a:p xmlns:a="http://schemas.openxmlformats.org/drawingml/2006/main">
             <a:pPr algn="l">
+              <a:buNone/>
               <a:defRPr sz="1725" b="1">
                 <a:solidFill>
                   <a:srgbClr val="101216"/>
                 </a:solidFill>
-                <a:latin typeface="PingFang SC"/>
-                <a:ea typeface="PingFang SC"/>
-                <a:cs typeface="PingFang SC"/>
+                <a:latin typeface="Alibaba PuHuiTi"/>
+                <a:ea typeface="Alibaba PuHuiTi"/>
+                <a:cs typeface="Alibaba PuHuiTi"/>
               </a:defRPr>
             </a:pPr>
             <a:r>
@@ -1746,9 +1752,9 @@
                 <a:solidFill>
                   <a:srgbClr val="101216"/>
                 </a:solidFill>
-                <a:latin typeface="PingFang SC"/>
-                <a:ea typeface="PingFang SC"/>
-                <a:cs typeface="PingFang SC"/>
+                <a:latin typeface="Alibaba PuHuiTi"/>
+                <a:ea typeface="Alibaba PuHuiTi"/>
+                <a:cs typeface="Alibaba PuHuiTi"/>
               </a:rPr>
               <a:t>awesome</a:t>
             </a:r>
@@ -1788,13 +1794,14 @@
           <a:lstStyle xmlns:a="http://schemas.openxmlformats.org/drawingml/2006/main"/>
           <a:p xmlns:a="http://schemas.openxmlformats.org/drawingml/2006/main">
             <a:pPr algn="l">
+              <a:buNone/>
               <a:defRPr sz="1575" b="1">
                 <a:solidFill>
                   <a:srgbClr val="101216"/>
                 </a:solidFill>
-                <a:latin typeface="PingFang SC"/>
-                <a:ea typeface="PingFang SC"/>
-                <a:cs typeface="PingFang SC"/>
+                <a:latin typeface="Alibaba PuHuiTi"/>
+                <a:ea typeface="Alibaba PuHuiTi"/>
+                <a:cs typeface="Alibaba PuHuiTi"/>
               </a:defRPr>
             </a:pPr>
             <a:r>
@@ -1802,9 +1809,9 @@
                 <a:solidFill>
                   <a:srgbClr val="101216"/>
                 </a:solidFill>
-                <a:latin typeface="PingFang SC"/>
-                <a:ea typeface="PingFang SC"/>
-                <a:cs typeface="PingFang SC"/>
+                <a:latin typeface="Alibaba PuHuiTi"/>
+                <a:ea typeface="Alibaba PuHuiTi"/>
+                <a:cs typeface="Alibaba PuHuiTi"/>
               </a:rPr>
               <a:t>awesome-mcp-servers</a:t>
             </a:r>
@@ -1844,13 +1851,14 @@
           <a:lstStyle xmlns:a="http://schemas.openxmlformats.org/drawingml/2006/main"/>
           <a:p xmlns:a="http://schemas.openxmlformats.org/drawingml/2006/main">
             <a:pPr algn="l">
+              <a:buNone/>
               <a:defRPr sz="1350" b="1">
                 <a:solidFill>
                   <a:srgbClr val="C85A3A"/>
                 </a:solidFill>
-                <a:latin typeface="PingFang SC"/>
-                <a:ea typeface="PingFang SC"/>
-                <a:cs typeface="PingFang SC"/>
+                <a:latin typeface="Alibaba PuHuiTi"/>
+                <a:ea typeface="Alibaba PuHuiTi"/>
+                <a:cs typeface="Alibaba PuHuiTi"/>
               </a:defRPr>
             </a:pPr>
             <a:r>
@@ -1858,9 +1866,9 @@
                 <a:solidFill>
                   <a:srgbClr val="C85A3A"/>
                 </a:solidFill>
-                <a:latin typeface="PingFang SC"/>
-                <a:ea typeface="PingFang SC"/>
-                <a:cs typeface="PingFang SC"/>
+                <a:latin typeface="Alibaba PuHuiTi"/>
+                <a:ea typeface="Alibaba PuHuiTi"/>
+                <a:cs typeface="Alibaba PuHuiTi"/>
               </a:rPr>
               <a:t>02</a:t>
             </a:r>
@@ -1900,13 +1908,14 @@
           <a:lstStyle xmlns:a="http://schemas.openxmlformats.org/drawingml/2006/main"/>
           <a:p xmlns:a="http://schemas.openxmlformats.org/drawingml/2006/main">
             <a:pPr algn="l">
+              <a:buNone/>
               <a:defRPr sz="2400" b="1">
                 <a:solidFill>
                   <a:srgbClr val="101216"/>
                 </a:solidFill>
-                <a:latin typeface="PingFang SC"/>
-                <a:ea typeface="PingFang SC"/>
-                <a:cs typeface="PingFang SC"/>
+                <a:latin typeface="Alibaba PuHuiTi"/>
+                <a:ea typeface="Alibaba PuHuiTi"/>
+                <a:cs typeface="Alibaba PuHuiTi"/>
               </a:defRPr>
             </a:pPr>
             <a:r>
@@ -1914,9 +1923,9 @@
                 <a:solidFill>
                   <a:srgbClr val="101216"/>
                 </a:solidFill>
-                <a:latin typeface="PingFang SC"/>
-                <a:ea typeface="PingFang SC"/>
-                <a:cs typeface="PingFang SC"/>
+                <a:latin typeface="Alibaba PuHuiTi"/>
+                <a:ea typeface="Alibaba PuHuiTi"/>
+                <a:cs typeface="Alibaba PuHuiTi"/>
               </a:rPr>
               <a:t>复用</a:t>
             </a:r>
@@ -1956,13 +1965,14 @@
           <a:lstStyle xmlns:a="http://schemas.openxmlformats.org/drawingml/2006/main"/>
           <a:p xmlns:a="http://schemas.openxmlformats.org/drawingml/2006/main">
             <a:pPr algn="l">
+              <a:buNone/>
               <a:defRPr sz="1575" b="0">
                 <a:solidFill>
                   <a:srgbClr val="59616C"/>
                 </a:solidFill>
-                <a:latin typeface="PingFang SC"/>
-                <a:ea typeface="PingFang SC"/>
-                <a:cs typeface="PingFang SC"/>
+                <a:latin typeface="Alibaba PuHuiTi"/>
+                <a:ea typeface="Alibaba PuHuiTi"/>
+                <a:cs typeface="Alibaba PuHuiTi"/>
               </a:defRPr>
             </a:pPr>
             <a:r>
@@ -1970,9 +1980,9 @@
                 <a:solidFill>
                   <a:srgbClr val="59616C"/>
                 </a:solidFill>
-                <a:latin typeface="PingFang SC"/>
-                <a:ea typeface="PingFang SC"/>
-                <a:cs typeface="PingFang SC"/>
+                <a:latin typeface="Alibaba PuHuiTi"/>
+                <a:ea typeface="Alibaba PuHuiTi"/>
+                <a:cs typeface="Alibaba PuHuiTi"/>
               </a:rPr>
               <a:t>拿走一份文件</a:t>
             </a:r>
@@ -2045,13 +2055,14 @@
           <a:lstStyle xmlns:a="http://schemas.openxmlformats.org/drawingml/2006/main"/>
           <a:p xmlns:a="http://schemas.openxmlformats.org/drawingml/2006/main">
             <a:pPr algn="l">
+              <a:buNone/>
               <a:defRPr sz="1725" b="1">
                 <a:solidFill>
                   <a:srgbClr val="101216"/>
                 </a:solidFill>
-                <a:latin typeface="PingFang SC"/>
-                <a:ea typeface="PingFang SC"/>
-                <a:cs typeface="PingFang SC"/>
+                <a:latin typeface="Alibaba PuHuiTi"/>
+                <a:ea typeface="Alibaba PuHuiTi"/>
+                <a:cs typeface="Alibaba PuHuiTi"/>
               </a:defRPr>
             </a:pPr>
             <a:r>
@@ -2059,9 +2070,9 @@
                 <a:solidFill>
                   <a:srgbClr val="101216"/>
                 </a:solidFill>
-                <a:latin typeface="PingFang SC"/>
-                <a:ea typeface="PingFang SC"/>
-                <a:cs typeface="PingFang SC"/>
+                <a:latin typeface="Alibaba PuHuiTi"/>
+                <a:ea typeface="Alibaba PuHuiTi"/>
+                <a:cs typeface="Alibaba PuHuiTi"/>
               </a:rPr>
               <a:t>awesome-design-md</a:t>
             </a:r>
@@ -2101,13 +2112,14 @@
           <a:lstStyle xmlns:a="http://schemas.openxmlformats.org/drawingml/2006/main"/>
           <a:p xmlns:a="http://schemas.openxmlformats.org/drawingml/2006/main">
             <a:pPr algn="l">
+              <a:buNone/>
               <a:defRPr sz="1575" b="1">
                 <a:solidFill>
                   <a:srgbClr val="101216"/>
                 </a:solidFill>
-                <a:latin typeface="PingFang SC"/>
-                <a:ea typeface="PingFang SC"/>
-                <a:cs typeface="PingFang SC"/>
+                <a:latin typeface="Alibaba PuHuiTi"/>
+                <a:ea typeface="Alibaba PuHuiTi"/>
+                <a:cs typeface="Alibaba PuHuiTi"/>
               </a:defRPr>
             </a:pPr>
             <a:r>
@@ -2115,9 +2127,9 @@
                 <a:solidFill>
                   <a:srgbClr val="101216"/>
                 </a:solidFill>
-                <a:latin typeface="PingFang SC"/>
-                <a:ea typeface="PingFang SC"/>
-                <a:cs typeface="PingFang SC"/>
+                <a:latin typeface="Alibaba PuHuiTi"/>
+                <a:ea typeface="Alibaba PuHuiTi"/>
+                <a:cs typeface="Alibaba PuHuiTi"/>
               </a:rPr>
               <a:t>awesome-gpt-image-2</a:t>
             </a:r>
@@ -2157,13 +2169,14 @@
           <a:lstStyle xmlns:a="http://schemas.openxmlformats.org/drawingml/2006/main"/>
           <a:p xmlns:a="http://schemas.openxmlformats.org/drawingml/2006/main">
             <a:pPr algn="l">
+              <a:buNone/>
               <a:defRPr sz="1350" b="1">
                 <a:solidFill>
                   <a:srgbClr val="C85A3A"/>
                 </a:solidFill>
-                <a:latin typeface="PingFang SC"/>
-                <a:ea typeface="PingFang SC"/>
-                <a:cs typeface="PingFang SC"/>
+                <a:latin typeface="Alibaba PuHuiTi"/>
+                <a:ea typeface="Alibaba PuHuiTi"/>
+                <a:cs typeface="Alibaba PuHuiTi"/>
               </a:defRPr>
             </a:pPr>
             <a:r>
@@ -2171,9 +2184,9 @@
                 <a:solidFill>
                   <a:srgbClr val="C85A3A"/>
                 </a:solidFill>
-                <a:latin typeface="PingFang SC"/>
-                <a:ea typeface="PingFang SC"/>
-                <a:cs typeface="PingFang SC"/>
+                <a:latin typeface="Alibaba PuHuiTi"/>
+                <a:ea typeface="Alibaba PuHuiTi"/>
+                <a:cs typeface="Alibaba PuHuiTi"/>
               </a:rPr>
               <a:t>03</a:t>
             </a:r>
@@ -2213,13 +2226,14 @@
           <a:lstStyle xmlns:a="http://schemas.openxmlformats.org/drawingml/2006/main"/>
           <a:p xmlns:a="http://schemas.openxmlformats.org/drawingml/2006/main">
             <a:pPr algn="l">
+              <a:buNone/>
               <a:defRPr sz="2400" b="1">
                 <a:solidFill>
                   <a:srgbClr val="101216"/>
                 </a:solidFill>
-                <a:latin typeface="PingFang SC"/>
-                <a:ea typeface="PingFang SC"/>
-                <a:cs typeface="PingFang SC"/>
+                <a:latin typeface="Alibaba PuHuiTi"/>
+                <a:ea typeface="Alibaba PuHuiTi"/>
+                <a:cs typeface="Alibaba PuHuiTi"/>
               </a:defRPr>
             </a:pPr>
             <a:r>
@@ -2227,9 +2241,9 @@
                 <a:solidFill>
                   <a:srgbClr val="101216"/>
                 </a:solidFill>
-                <a:latin typeface="PingFang SC"/>
-                <a:ea typeface="PingFang SC"/>
-                <a:cs typeface="PingFang SC"/>
+                <a:latin typeface="Alibaba PuHuiTi"/>
+                <a:ea typeface="Alibaba PuHuiTi"/>
+                <a:cs typeface="Alibaba PuHuiTi"/>
               </a:rPr>
               <a:t>安装</a:t>
             </a:r>
@@ -2269,13 +2283,14 @@
           <a:lstStyle xmlns:a="http://schemas.openxmlformats.org/drawingml/2006/main"/>
           <a:p xmlns:a="http://schemas.openxmlformats.org/drawingml/2006/main">
             <a:pPr algn="l">
+              <a:buNone/>
               <a:defRPr sz="1575" b="0">
                 <a:solidFill>
                   <a:srgbClr val="59616C"/>
                 </a:solidFill>
-                <a:latin typeface="PingFang SC"/>
-                <a:ea typeface="PingFang SC"/>
-                <a:cs typeface="PingFang SC"/>
+                <a:latin typeface="Alibaba PuHuiTi"/>
+                <a:ea typeface="Alibaba PuHuiTi"/>
+                <a:cs typeface="Alibaba PuHuiTi"/>
               </a:defRPr>
             </a:pPr>
             <a:r>
@@ -2283,9 +2298,9 @@
                 <a:solidFill>
                   <a:srgbClr val="59616C"/>
                 </a:solidFill>
-                <a:latin typeface="PingFang SC"/>
-                <a:ea typeface="PingFang SC"/>
-                <a:cs typeface="PingFang SC"/>
+                <a:latin typeface="Alibaba PuHuiTi"/>
+                <a:ea typeface="Alibaba PuHuiTi"/>
+                <a:cs typeface="Alibaba PuHuiTi"/>
               </a:rPr>
               <a:t>交给工具安装</a:t>
             </a:r>
@@ -2358,13 +2373,14 @@
           <a:lstStyle xmlns:a="http://schemas.openxmlformats.org/drawingml/2006/main"/>
           <a:p xmlns:a="http://schemas.openxmlformats.org/drawingml/2006/main">
             <a:pPr algn="l">
+              <a:buNone/>
               <a:defRPr sz="1725" b="1">
                 <a:solidFill>
                   <a:srgbClr val="101216"/>
                 </a:solidFill>
-                <a:latin typeface="PingFang SC"/>
-                <a:ea typeface="PingFang SC"/>
-                <a:cs typeface="PingFang SC"/>
+                <a:latin typeface="Alibaba PuHuiTi"/>
+                <a:ea typeface="Alibaba PuHuiTi"/>
+                <a:cs typeface="Alibaba PuHuiTi"/>
               </a:defRPr>
             </a:pPr>
             <a:r>
@@ -2372,9 +2388,9 @@
                 <a:solidFill>
                   <a:srgbClr val="101216"/>
                 </a:solidFill>
-                <a:latin typeface="PingFang SC"/>
-                <a:ea typeface="PingFang SC"/>
-                <a:cs typeface="PingFang SC"/>
+                <a:latin typeface="Alibaba PuHuiTi"/>
+                <a:ea typeface="Alibaba PuHuiTi"/>
+                <a:cs typeface="Alibaba PuHuiTi"/>
               </a:rPr>
               <a:t>vercel-labs/skills</a:t>
             </a:r>
@@ -2414,13 +2430,14 @@
           <a:lstStyle xmlns:a="http://schemas.openxmlformats.org/drawingml/2006/main"/>
           <a:p xmlns:a="http://schemas.openxmlformats.org/drawingml/2006/main">
             <a:pPr algn="l">
+              <a:buNone/>
               <a:defRPr sz="1725" b="1">
                 <a:solidFill>
                   <a:srgbClr val="101216"/>
                 </a:solidFill>
-                <a:latin typeface="PingFang SC"/>
-                <a:ea typeface="PingFang SC"/>
-                <a:cs typeface="PingFang SC"/>
+                <a:latin typeface="Alibaba PuHuiTi"/>
+                <a:ea typeface="Alibaba PuHuiTi"/>
+                <a:cs typeface="Alibaba PuHuiTi"/>
               </a:defRPr>
             </a:pPr>
             <a:r>
@@ -2428,9 +2445,9 @@
                 <a:solidFill>
                   <a:srgbClr val="101216"/>
                 </a:solidFill>
-                <a:latin typeface="PingFang SC"/>
-                <a:ea typeface="PingFang SC"/>
-                <a:cs typeface="PingFang SC"/>
+                <a:latin typeface="Alibaba PuHuiTi"/>
+                <a:ea typeface="Alibaba PuHuiTi"/>
+                <a:cs typeface="Alibaba PuHuiTi"/>
               </a:rPr>
               <a:t>anthropics/skills</a:t>
             </a:r>
@@ -2470,13 +2487,14 @@
           <a:lstStyle xmlns:a="http://schemas.openxmlformats.org/drawingml/2006/main"/>
           <a:p xmlns:a="http://schemas.openxmlformats.org/drawingml/2006/main">
             <a:pPr algn="l">
+              <a:buNone/>
               <a:defRPr sz="1350" b="1">
                 <a:solidFill>
                   <a:srgbClr val="C85A3A"/>
                 </a:solidFill>
-                <a:latin typeface="PingFang SC"/>
-                <a:ea typeface="PingFang SC"/>
-                <a:cs typeface="PingFang SC"/>
+                <a:latin typeface="Alibaba PuHuiTi"/>
+                <a:ea typeface="Alibaba PuHuiTi"/>
+                <a:cs typeface="Alibaba PuHuiTi"/>
               </a:defRPr>
             </a:pPr>
             <a:r>
@@ -2484,9 +2502,9 @@
                 <a:solidFill>
                   <a:srgbClr val="C85A3A"/>
                 </a:solidFill>
-                <a:latin typeface="PingFang SC"/>
-                <a:ea typeface="PingFang SC"/>
-                <a:cs typeface="PingFang SC"/>
+                <a:latin typeface="Alibaba PuHuiTi"/>
+                <a:ea typeface="Alibaba PuHuiTi"/>
+                <a:cs typeface="Alibaba PuHuiTi"/>
               </a:rPr>
               <a:t>04</a:t>
             </a:r>
@@ -2526,13 +2544,14 @@
           <a:lstStyle xmlns:a="http://schemas.openxmlformats.org/drawingml/2006/main"/>
           <a:p xmlns:a="http://schemas.openxmlformats.org/drawingml/2006/main">
             <a:pPr algn="l">
+              <a:buNone/>
               <a:defRPr sz="2400" b="1">
                 <a:solidFill>
                   <a:srgbClr val="101216"/>
                 </a:solidFill>
-                <a:latin typeface="PingFang SC"/>
-                <a:ea typeface="PingFang SC"/>
-                <a:cs typeface="PingFang SC"/>
+                <a:latin typeface="Alibaba PuHuiTi"/>
+                <a:ea typeface="Alibaba PuHuiTi"/>
+                <a:cs typeface="Alibaba PuHuiTi"/>
               </a:defRPr>
             </a:pPr>
             <a:r>
@@ -2540,9 +2559,9 @@
                 <a:solidFill>
                   <a:srgbClr val="101216"/>
                 </a:solidFill>
-                <a:latin typeface="PingFang SC"/>
-                <a:ea typeface="PingFang SC"/>
-                <a:cs typeface="PingFang SC"/>
+                <a:latin typeface="Alibaba PuHuiTi"/>
+                <a:ea typeface="Alibaba PuHuiTi"/>
+                <a:cs typeface="Alibaba PuHuiTi"/>
               </a:rPr>
               <a:t>工作方法</a:t>
             </a:r>
@@ -2582,13 +2601,14 @@
           <a:lstStyle xmlns:a="http://schemas.openxmlformats.org/drawingml/2006/main"/>
           <a:p xmlns:a="http://schemas.openxmlformats.org/drawingml/2006/main">
             <a:pPr algn="l">
+              <a:buNone/>
               <a:defRPr sz="1575" b="0">
                 <a:solidFill>
                   <a:srgbClr val="59616C"/>
                 </a:solidFill>
-                <a:latin typeface="PingFang SC"/>
-                <a:ea typeface="PingFang SC"/>
-                <a:cs typeface="PingFang SC"/>
+                <a:latin typeface="Alibaba PuHuiTi"/>
+                <a:ea typeface="Alibaba PuHuiTi"/>
+                <a:cs typeface="Alibaba PuHuiTi"/>
               </a:defRPr>
             </a:pPr>
             <a:r>
@@ -2596,9 +2616,9 @@
                 <a:solidFill>
                   <a:srgbClr val="59616C"/>
                 </a:solidFill>
-                <a:latin typeface="PingFang SC"/>
-                <a:ea typeface="PingFang SC"/>
-                <a:cs typeface="PingFang SC"/>
+                <a:latin typeface="Alibaba PuHuiTi"/>
+                <a:ea typeface="Alibaba PuHuiTi"/>
+                <a:cs typeface="Alibaba PuHuiTi"/>
               </a:rPr>
               <a:t>规定 agent 怎么做</a:t>
             </a:r>
@@ -2671,13 +2691,14 @@
           <a:lstStyle xmlns:a="http://schemas.openxmlformats.org/drawingml/2006/main"/>
           <a:p xmlns:a="http://schemas.openxmlformats.org/drawingml/2006/main">
             <a:pPr algn="l">
+              <a:buNone/>
               <a:defRPr sz="1725" b="1">
                 <a:solidFill>
                   <a:srgbClr val="101216"/>
                 </a:solidFill>
-                <a:latin typeface="PingFang SC"/>
-                <a:ea typeface="PingFang SC"/>
-                <a:cs typeface="PingFang SC"/>
+                <a:latin typeface="Alibaba PuHuiTi"/>
+                <a:ea typeface="Alibaba PuHuiTi"/>
+                <a:cs typeface="Alibaba PuHuiTi"/>
               </a:defRPr>
             </a:pPr>
             <a:r>
@@ -2685,9 +2706,9 @@
                 <a:solidFill>
                   <a:srgbClr val="101216"/>
                 </a:solidFill>
-                <a:latin typeface="PingFang SC"/>
-                <a:ea typeface="PingFang SC"/>
-                <a:cs typeface="PingFang SC"/>
+                <a:latin typeface="Alibaba PuHuiTi"/>
+                <a:ea typeface="Alibaba PuHuiTi"/>
+                <a:cs typeface="Alibaba PuHuiTi"/>
               </a:rPr>
               <a:t>obra/superpowers</a:t>
             </a:r>
@@ -2727,13 +2748,14 @@
           <a:lstStyle xmlns:a="http://schemas.openxmlformats.org/drawingml/2006/main"/>
           <a:p xmlns:a="http://schemas.openxmlformats.org/drawingml/2006/main">
             <a:pPr algn="l">
+              <a:buNone/>
               <a:defRPr sz="1725" b="1">
                 <a:solidFill>
                   <a:srgbClr val="101216"/>
                 </a:solidFill>
-                <a:latin typeface="PingFang SC"/>
-                <a:ea typeface="PingFang SC"/>
-                <a:cs typeface="PingFang SC"/>
+                <a:latin typeface="Alibaba PuHuiTi"/>
+                <a:ea typeface="Alibaba PuHuiTi"/>
+                <a:cs typeface="Alibaba PuHuiTi"/>
               </a:defRPr>
             </a:pPr>
             <a:r>
@@ -2741,9 +2763,9 @@
                 <a:solidFill>
                   <a:srgbClr val="101216"/>
                 </a:solidFill>
-                <a:latin typeface="PingFang SC"/>
-                <a:ea typeface="PingFang SC"/>
-                <a:cs typeface="PingFang SC"/>
+                <a:latin typeface="Alibaba PuHuiTi"/>
+                <a:ea typeface="Alibaba PuHuiTi"/>
+                <a:cs typeface="Alibaba PuHuiTi"/>
               </a:rPr>
               <a:t>github/spec-kit</a:t>
             </a:r>
@@ -2816,13 +2838,14 @@
           <a:lstStyle xmlns:a="http://schemas.openxmlformats.org/drawingml/2006/main"/>
           <a:p xmlns:a="http://schemas.openxmlformats.org/drawingml/2006/main">
             <a:pPr algn="l">
+              <a:buNone/>
               <a:defRPr sz="2250" b="1">
                 <a:solidFill>
                   <a:srgbClr val="101216"/>
                 </a:solidFill>
-                <a:latin typeface="PingFang SC"/>
-                <a:ea typeface="PingFang SC"/>
-                <a:cs typeface="PingFang SC"/>
+                <a:latin typeface="Alibaba PuHuiTi"/>
+                <a:ea typeface="Alibaba PuHuiTi"/>
+                <a:cs typeface="Alibaba PuHuiTi"/>
               </a:defRPr>
             </a:pPr>
             <a:r>
@@ -2830,9 +2853,9 @@
                 <a:solidFill>
                   <a:srgbClr val="101216"/>
                 </a:solidFill>
-                <a:latin typeface="PingFang SC"/>
-                <a:ea typeface="PingFang SC"/>
-                <a:cs typeface="PingFang SC"/>
+                <a:latin typeface="Alibaba PuHuiTi"/>
+                <a:ea typeface="Alibaba PuHuiTi"/>
+                <a:cs typeface="Alibaba PuHuiTi"/>
               </a:rPr>
               <a:t>越靠右，agent 可以直接使用的内容越多。</a:t>
             </a:r>
@@ -2901,13 +2924,14 @@
           <a:lstStyle xmlns:a="http://schemas.openxmlformats.org/drawingml/2006/main"/>
           <a:p xmlns:a="http://schemas.openxmlformats.org/drawingml/2006/main">
             <a:pPr algn="l">
+              <a:buNone/>
               <a:defRPr sz="3150" b="1">
                 <a:solidFill>
                   <a:srgbClr val="101216"/>
                 </a:solidFill>
-                <a:latin typeface="PingFang SC"/>
-                <a:ea typeface="PingFang SC"/>
-                <a:cs typeface="PingFang SC"/>
+                <a:latin typeface="Alibaba PuHuiTi"/>
+                <a:ea typeface="Alibaba PuHuiTi"/>
+                <a:cs typeface="Alibaba PuHuiTi"/>
               </a:defRPr>
             </a:pPr>
             <a:r>
@@ -2915,9 +2939,9 @@
                 <a:solidFill>
                   <a:srgbClr val="101216"/>
                 </a:solidFill>
-                <a:latin typeface="PingFang SC"/>
-                <a:ea typeface="PingFang SC"/>
-                <a:cs typeface="PingFang SC"/>
+                <a:latin typeface="Alibaba PuHuiTi"/>
+                <a:ea typeface="Alibaba PuHuiTi"/>
+                <a:cs typeface="Alibaba PuHuiTi"/>
               </a:rPr>
               <a:t>目录还在，内容已经可以直接放进项目里</a:t>
             </a:r>
@@ -2957,13 +2981,14 @@
           <a:lstStyle xmlns:a="http://schemas.openxmlformats.org/drawingml/2006/main"/>
           <a:p xmlns:a="http://schemas.openxmlformats.org/drawingml/2006/main">
             <a:pPr algn="l">
+              <a:buNone/>
               <a:defRPr sz="1575" b="0">
                 <a:solidFill>
                   <a:srgbClr val="59616C"/>
                 </a:solidFill>
-                <a:latin typeface="PingFang SC"/>
-                <a:ea typeface="PingFang SC"/>
-                <a:cs typeface="PingFang SC"/>
+                <a:latin typeface="Alibaba PuHuiTi"/>
+                <a:ea typeface="Alibaba PuHuiTi"/>
+                <a:cs typeface="Alibaba PuHuiTi"/>
               </a:defRPr>
             </a:pPr>
             <a:r>
@@ -2971,9 +2996,9 @@
                 <a:solidFill>
                   <a:srgbClr val="59616C"/>
                 </a:solidFill>
-                <a:latin typeface="PingFang SC"/>
-                <a:ea typeface="PingFang SC"/>
-                <a:cs typeface="PingFang SC"/>
+                <a:latin typeface="Alibaba PuHuiTi"/>
+                <a:ea typeface="Alibaba PuHuiTi"/>
+                <a:cs typeface="Alibaba PuHuiTi"/>
               </a:rPr>
               <a:t>这四个项目分别交付入口、工具接口、设计规则和生图方法。</a:t>
             </a:r>
@@ -3046,13 +3071,14 @@
           <a:lstStyle xmlns:a="http://schemas.openxmlformats.org/drawingml/2006/main"/>
           <a:p xmlns:a="http://schemas.openxmlformats.org/drawingml/2006/main">
             <a:pPr algn="l">
+              <a:buNone/>
               <a:defRPr sz="1875" b="1">
                 <a:solidFill>
                   <a:srgbClr val="101216"/>
                 </a:solidFill>
-                <a:latin typeface="PingFang SC"/>
-                <a:ea typeface="PingFang SC"/>
-                <a:cs typeface="PingFang SC"/>
+                <a:latin typeface="Alibaba PuHuiTi"/>
+                <a:ea typeface="Alibaba PuHuiTi"/>
+                <a:cs typeface="Alibaba PuHuiTi"/>
               </a:defRPr>
             </a:pPr>
             <a:r>
@@ -3060,9 +3086,9 @@
                 <a:solidFill>
                   <a:srgbClr val="101216"/>
                 </a:solidFill>
-                <a:latin typeface="PingFang SC"/>
-                <a:ea typeface="PingFang SC"/>
-                <a:cs typeface="PingFang SC"/>
+                <a:latin typeface="Alibaba PuHuiTi"/>
+                <a:ea typeface="Alibaba PuHuiTi"/>
+                <a:cs typeface="Alibaba PuHuiTi"/>
               </a:rPr>
               <a:t>awesome</a:t>
             </a:r>
@@ -3102,13 +3128,14 @@
           <a:lstStyle xmlns:a="http://schemas.openxmlformats.org/drawingml/2006/main"/>
           <a:p xmlns:a="http://schemas.openxmlformats.org/drawingml/2006/main">
             <a:pPr algn="l">
+              <a:buNone/>
               <a:defRPr sz="1125" b="0">
                 <a:solidFill>
                   <a:srgbClr val="59616C"/>
                 </a:solidFill>
-                <a:latin typeface="PingFang SC"/>
-                <a:ea typeface="PingFang SC"/>
-                <a:cs typeface="PingFang SC"/>
+                <a:latin typeface="Alibaba PuHuiTi"/>
+                <a:ea typeface="Alibaba PuHuiTi"/>
+                <a:cs typeface="Alibaba PuHuiTi"/>
               </a:defRPr>
             </a:pPr>
             <a:r>
@@ -3116,9 +3143,9 @@
                 <a:solidFill>
                   <a:srgbClr val="59616C"/>
                 </a:solidFill>
-                <a:latin typeface="PingFang SC"/>
-                <a:ea typeface="PingFang SC"/>
-                <a:cs typeface="PingFang SC"/>
+                <a:latin typeface="Alibaba PuHuiTi"/>
+                <a:ea typeface="Alibaba PuHuiTi"/>
+                <a:cs typeface="Alibaba PuHuiTi"/>
               </a:rPr>
               <a:t>sindresorhus</a:t>
             </a:r>
@@ -3158,13 +3185,14 @@
           <a:lstStyle xmlns:a="http://schemas.openxmlformats.org/drawingml/2006/main"/>
           <a:p xmlns:a="http://schemas.openxmlformats.org/drawingml/2006/main">
             <a:pPr algn="l">
+              <a:buNone/>
               <a:defRPr sz="1275" b="1">
                 <a:solidFill>
                   <a:srgbClr val="C85A3A"/>
                 </a:solidFill>
-                <a:latin typeface="PingFang SC"/>
-                <a:ea typeface="PingFang SC"/>
-                <a:cs typeface="PingFang SC"/>
+                <a:latin typeface="Alibaba PuHuiTi"/>
+                <a:ea typeface="Alibaba PuHuiTi"/>
+                <a:cs typeface="Alibaba PuHuiTi"/>
               </a:defRPr>
             </a:pPr>
             <a:r>
@@ -3172,9 +3200,9 @@
                 <a:solidFill>
                   <a:srgbClr val="C85A3A"/>
                 </a:solidFill>
-                <a:latin typeface="PingFang SC"/>
-                <a:ea typeface="PingFang SC"/>
-                <a:cs typeface="PingFang SC"/>
+                <a:latin typeface="Alibaba PuHuiTi"/>
+                <a:ea typeface="Alibaba PuHuiTi"/>
+                <a:cs typeface="Alibaba PuHuiTi"/>
               </a:rPr>
               <a:t>经典元目录</a:t>
             </a:r>
@@ -3214,13 +3242,14 @@
           <a:lstStyle xmlns:a="http://schemas.openxmlformats.org/drawingml/2006/main"/>
           <a:p xmlns:a="http://schemas.openxmlformats.org/drawingml/2006/main">
             <a:pPr algn="l">
+              <a:buNone/>
               <a:defRPr sz="1650" b="0">
                 <a:solidFill>
                   <a:srgbClr val="101216"/>
                 </a:solidFill>
-                <a:latin typeface="PingFang SC"/>
-                <a:ea typeface="PingFang SC"/>
-                <a:cs typeface="PingFang SC"/>
+                <a:latin typeface="Alibaba PuHuiTi"/>
+                <a:ea typeface="Alibaba PuHuiTi"/>
+                <a:cs typeface="Alibaba PuHuiTi"/>
               </a:defRPr>
             </a:pPr>
             <a:r>
@@ -3228,9 +3257,9 @@
                 <a:solidFill>
                   <a:srgbClr val="101216"/>
                 </a:solidFill>
-                <a:latin typeface="PingFang SC"/>
-                <a:ea typeface="PingFang SC"/>
-                <a:cs typeface="PingFang SC"/>
+                <a:latin typeface="Alibaba PuHuiTi"/>
+                <a:ea typeface="Alibaba PuHuiTi"/>
+                <a:cs typeface="Alibaba PuHuiTi"/>
               </a:rPr>
               <a:t>它是一份“列表的列表”。主题从命令行工具到设计资源，先帮人找到下一份清单。</a:t>
             </a:r>
@@ -3270,13 +3299,14 @@
           <a:lstStyle xmlns:a="http://schemas.openxmlformats.org/drawingml/2006/main"/>
           <a:p xmlns:a="http://schemas.openxmlformats.org/drawingml/2006/main">
             <a:pPr algn="l">
+              <a:buNone/>
               <a:defRPr sz="1425" b="0">
                 <a:solidFill>
                   <a:srgbClr val="59616C"/>
                 </a:solidFill>
-                <a:latin typeface="PingFang SC"/>
-                <a:ea typeface="PingFang SC"/>
-                <a:cs typeface="PingFang SC"/>
+                <a:latin typeface="Alibaba PuHuiTi"/>
+                <a:ea typeface="Alibaba PuHuiTi"/>
+                <a:cs typeface="Alibaba PuHuiTi"/>
               </a:defRPr>
             </a:pPr>
             <a:r>
@@ -3284,9 +3314,9 @@
                 <a:solidFill>
                   <a:srgbClr val="59616C"/>
                 </a:solidFill>
-                <a:latin typeface="PingFang SC"/>
-                <a:ea typeface="PingFang SC"/>
-                <a:cs typeface="PingFang SC"/>
+                <a:latin typeface="Alibaba PuHuiTi"/>
+                <a:ea typeface="Alibaba PuHuiTi"/>
+                <a:cs typeface="Alibaba PuHuiTi"/>
               </a:rPr>
               <a:t>使用者自己浏览、判断，再把需要的项目摘出来。</a:t>
             </a:r>
@@ -3359,13 +3389,14 @@
           <a:lstStyle xmlns:a="http://schemas.openxmlformats.org/drawingml/2006/main"/>
           <a:p xmlns:a="http://schemas.openxmlformats.org/drawingml/2006/main">
             <a:pPr algn="l">
+              <a:buNone/>
               <a:defRPr sz="1875" b="1">
                 <a:solidFill>
                   <a:srgbClr val="101216"/>
                 </a:solidFill>
-                <a:latin typeface="PingFang SC"/>
-                <a:ea typeface="PingFang SC"/>
-                <a:cs typeface="PingFang SC"/>
+                <a:latin typeface="Alibaba PuHuiTi"/>
+                <a:ea typeface="Alibaba PuHuiTi"/>
+                <a:cs typeface="Alibaba PuHuiTi"/>
               </a:defRPr>
             </a:pPr>
             <a:r>
@@ -3373,9 +3404,9 @@
                 <a:solidFill>
                   <a:srgbClr val="101216"/>
                 </a:solidFill>
-                <a:latin typeface="PingFang SC"/>
-                <a:ea typeface="PingFang SC"/>
-                <a:cs typeface="PingFang SC"/>
+                <a:latin typeface="Alibaba PuHuiTi"/>
+                <a:ea typeface="Alibaba PuHuiTi"/>
+                <a:cs typeface="Alibaba PuHuiTi"/>
               </a:rPr>
               <a:t>awesome-mcp-servers</a:t>
             </a:r>
@@ -3415,13 +3446,14 @@
           <a:lstStyle xmlns:a="http://schemas.openxmlformats.org/drawingml/2006/main"/>
           <a:p xmlns:a="http://schemas.openxmlformats.org/drawingml/2006/main">
             <a:pPr algn="l">
+              <a:buNone/>
               <a:defRPr sz="1125" b="0">
                 <a:solidFill>
                   <a:srgbClr val="59616C"/>
                 </a:solidFill>
-                <a:latin typeface="PingFang SC"/>
-                <a:ea typeface="PingFang SC"/>
-                <a:cs typeface="PingFang SC"/>
+                <a:latin typeface="Alibaba PuHuiTi"/>
+                <a:ea typeface="Alibaba PuHuiTi"/>
+                <a:cs typeface="Alibaba PuHuiTi"/>
               </a:defRPr>
             </a:pPr>
             <a:r>
@@ -3429,9 +3461,9 @@
                 <a:solidFill>
                   <a:srgbClr val="59616C"/>
                 </a:solidFill>
-                <a:latin typeface="PingFang SC"/>
-                <a:ea typeface="PingFang SC"/>
-                <a:cs typeface="PingFang SC"/>
+                <a:latin typeface="Alibaba PuHuiTi"/>
+                <a:ea typeface="Alibaba PuHuiTi"/>
+                <a:cs typeface="Alibaba PuHuiTi"/>
               </a:rPr>
               <a:t>punkpeye</a:t>
             </a:r>
@@ -3471,13 +3503,14 @@
           <a:lstStyle xmlns:a="http://schemas.openxmlformats.org/drawingml/2006/main"/>
           <a:p xmlns:a="http://schemas.openxmlformats.org/drawingml/2006/main">
             <a:pPr algn="l">
+              <a:buNone/>
               <a:defRPr sz="1275" b="1">
                 <a:solidFill>
                   <a:srgbClr val="C85A3A"/>
                 </a:solidFill>
-                <a:latin typeface="PingFang SC"/>
-                <a:ea typeface="PingFang SC"/>
-                <a:cs typeface="PingFang SC"/>
+                <a:latin typeface="Alibaba PuHuiTi"/>
+                <a:ea typeface="Alibaba PuHuiTi"/>
+                <a:cs typeface="Alibaba PuHuiTi"/>
               </a:defRPr>
             </a:pPr>
             <a:r>
@@ -3485,9 +3518,9 @@
                 <a:solidFill>
                   <a:srgbClr val="C85A3A"/>
                 </a:solidFill>
-                <a:latin typeface="PingFang SC"/>
-                <a:ea typeface="PingFang SC"/>
-                <a:cs typeface="PingFang SC"/>
+                <a:latin typeface="Alibaba PuHuiTi"/>
+                <a:ea typeface="Alibaba PuHuiTi"/>
+                <a:cs typeface="Alibaba PuHuiTi"/>
               </a:rPr>
               <a:t>工具目录</a:t>
             </a:r>
@@ -3527,13 +3560,14 @@
           <a:lstStyle xmlns:a="http://schemas.openxmlformats.org/drawingml/2006/main"/>
           <a:p xmlns:a="http://schemas.openxmlformats.org/drawingml/2006/main">
             <a:pPr algn="l">
+              <a:buNone/>
               <a:defRPr sz="1650" b="0">
                 <a:solidFill>
                   <a:srgbClr val="101216"/>
                 </a:solidFill>
-                <a:latin typeface="PingFang SC"/>
-                <a:ea typeface="PingFang SC"/>
-                <a:cs typeface="PingFang SC"/>
+                <a:latin typeface="Alibaba PuHuiTi"/>
+                <a:ea typeface="Alibaba PuHuiTi"/>
+                <a:cs typeface="Alibaba PuHuiTi"/>
               </a:defRPr>
             </a:pPr>
             <a:r>
@@ -3541,9 +3575,9 @@
                 <a:solidFill>
                   <a:srgbClr val="101216"/>
                 </a:solidFill>
-                <a:latin typeface="PingFang SC"/>
-                <a:ea typeface="PingFang SC"/>
-                <a:cs typeface="PingFang SC"/>
+                <a:latin typeface="Alibaba PuHuiTi"/>
+                <a:ea typeface="Alibaba PuHuiTi"/>
+                <a:cs typeface="Alibaba PuHuiTi"/>
               </a:rPr>
               <a:t>它收集 MCP servers：搜索、数据库、浏览器、文件系统等可供 agent 调用的外部能力。</a:t>
             </a:r>
@@ -3583,13 +3617,14 @@
           <a:lstStyle xmlns:a="http://schemas.openxmlformats.org/drawingml/2006/main"/>
           <a:p xmlns:a="http://schemas.openxmlformats.org/drawingml/2006/main">
             <a:pPr algn="l">
+              <a:buNone/>
               <a:defRPr sz="1425" b="0">
                 <a:solidFill>
                   <a:srgbClr val="59616C"/>
                 </a:solidFill>
-                <a:latin typeface="PingFang SC"/>
-                <a:ea typeface="PingFang SC"/>
-                <a:cs typeface="PingFang SC"/>
+                <a:latin typeface="Alibaba PuHuiTi"/>
+                <a:ea typeface="Alibaba PuHuiTi"/>
+                <a:cs typeface="Alibaba PuHuiTi"/>
               </a:defRPr>
             </a:pPr>
             <a:r>
@@ -3597,9 +3632,9 @@
                 <a:solidFill>
                   <a:srgbClr val="59616C"/>
                 </a:solidFill>
-                <a:latin typeface="PingFang SC"/>
-                <a:ea typeface="PingFang SC"/>
-                <a:cs typeface="PingFang SC"/>
+                <a:latin typeface="Alibaba PuHuiTi"/>
+                <a:ea typeface="Alibaba PuHuiTi"/>
+                <a:cs typeface="Alibaba PuHuiTi"/>
               </a:rPr>
               <a:t>人仍然负责挑选，但清单里的条目已经接近 agent 的工具接口。</a:t>
             </a:r>
@@ -3672,13 +3707,14 @@
           <a:lstStyle xmlns:a="http://schemas.openxmlformats.org/drawingml/2006/main"/>
           <a:p xmlns:a="http://schemas.openxmlformats.org/drawingml/2006/main">
             <a:pPr algn="l">
+              <a:buNone/>
               <a:defRPr sz="1875" b="1">
                 <a:solidFill>
                   <a:srgbClr val="101216"/>
                 </a:solidFill>
-                <a:latin typeface="PingFang SC"/>
-                <a:ea typeface="PingFang SC"/>
-                <a:cs typeface="PingFang SC"/>
+                <a:latin typeface="Alibaba PuHuiTi"/>
+                <a:ea typeface="Alibaba PuHuiTi"/>
+                <a:cs typeface="Alibaba PuHuiTi"/>
               </a:defRPr>
             </a:pPr>
             <a:r>
@@ -3686,9 +3722,9 @@
                 <a:solidFill>
                   <a:srgbClr val="101216"/>
                 </a:solidFill>
-                <a:latin typeface="PingFang SC"/>
-                <a:ea typeface="PingFang SC"/>
-                <a:cs typeface="PingFang SC"/>
+                <a:latin typeface="Alibaba PuHuiTi"/>
+                <a:ea typeface="Alibaba PuHuiTi"/>
+                <a:cs typeface="Alibaba PuHuiTi"/>
               </a:rPr>
               <a:t>awesome-design-md</a:t>
             </a:r>
@@ -3728,13 +3764,14 @@
           <a:lstStyle xmlns:a="http://schemas.openxmlformats.org/drawingml/2006/main"/>
           <a:p xmlns:a="http://schemas.openxmlformats.org/drawingml/2006/main">
             <a:pPr algn="l">
+              <a:buNone/>
               <a:defRPr sz="1125" b="0">
                 <a:solidFill>
                   <a:srgbClr val="59616C"/>
                 </a:solidFill>
-                <a:latin typeface="PingFang SC"/>
-                <a:ea typeface="PingFang SC"/>
-                <a:cs typeface="PingFang SC"/>
+                <a:latin typeface="Alibaba PuHuiTi"/>
+                <a:ea typeface="Alibaba PuHuiTi"/>
+                <a:cs typeface="Alibaba PuHuiTi"/>
               </a:defRPr>
             </a:pPr>
             <a:r>
@@ -3742,9 +3779,9 @@
                 <a:solidFill>
                   <a:srgbClr val="59616C"/>
                 </a:solidFill>
-                <a:latin typeface="PingFang SC"/>
-                <a:ea typeface="PingFang SC"/>
-                <a:cs typeface="PingFang SC"/>
+                <a:latin typeface="Alibaba PuHuiTi"/>
+                <a:ea typeface="Alibaba PuHuiTi"/>
+                <a:cs typeface="Alibaba PuHuiTi"/>
               </a:rPr>
               <a:t>VoltAgent</a:t>
             </a:r>
@@ -3784,13 +3821,14 @@
           <a:lstStyle xmlns:a="http://schemas.openxmlformats.org/drawingml/2006/main"/>
           <a:p xmlns:a="http://schemas.openxmlformats.org/drawingml/2006/main">
             <a:pPr algn="l">
+              <a:buNone/>
               <a:defRPr sz="1275" b="1">
                 <a:solidFill>
                   <a:srgbClr val="C85A3A"/>
                 </a:solidFill>
-                <a:latin typeface="PingFang SC"/>
-                <a:ea typeface="PingFang SC"/>
-                <a:cs typeface="PingFang SC"/>
+                <a:latin typeface="Alibaba PuHuiTi"/>
+                <a:ea typeface="Alibaba PuHuiTi"/>
+                <a:cs typeface="Alibaba PuHuiTi"/>
               </a:defRPr>
             </a:pPr>
             <a:r>
@@ -3798,9 +3836,9 @@
                 <a:solidFill>
                   <a:srgbClr val="C85A3A"/>
                 </a:solidFill>
-                <a:latin typeface="PingFang SC"/>
-                <a:ea typeface="PingFang SC"/>
-                <a:cs typeface="PingFang SC"/>
+                <a:latin typeface="Alibaba PuHuiTi"/>
+                <a:ea typeface="Alibaba PuHuiTi"/>
+                <a:cs typeface="Alibaba PuHuiTi"/>
               </a:rPr>
               <a:t>设计规则文件</a:t>
             </a:r>
@@ -3840,13 +3878,14 @@
           <a:lstStyle xmlns:a="http://schemas.openxmlformats.org/drawingml/2006/main"/>
           <a:p xmlns:a="http://schemas.openxmlformats.org/drawingml/2006/main">
             <a:pPr algn="l">
+              <a:buNone/>
               <a:defRPr sz="1650" b="0">
                 <a:solidFill>
                   <a:srgbClr val="101216"/>
                 </a:solidFill>
-                <a:latin typeface="PingFang SC"/>
-                <a:ea typeface="PingFang SC"/>
-                <a:cs typeface="PingFang SC"/>
+                <a:latin typeface="Alibaba PuHuiTi"/>
+                <a:ea typeface="Alibaba PuHuiTi"/>
+                <a:cs typeface="Alibaba PuHuiTi"/>
               </a:defRPr>
             </a:pPr>
             <a:r>
@@ -3854,9 +3893,9 @@
                 <a:solidFill>
                   <a:srgbClr val="101216"/>
                 </a:solidFill>
-                <a:latin typeface="PingFang SC"/>
-                <a:ea typeface="PingFang SC"/>
-                <a:cs typeface="PingFang SC"/>
+                <a:latin typeface="Alibaba PuHuiTi"/>
+                <a:ea typeface="Alibaba PuHuiTi"/>
+                <a:cs typeface="Alibaba PuHuiTi"/>
               </a:rPr>
               <a:t>它把品牌网站的颜色、字体、组件和禁区整理成 DESIGN.md。</a:t>
             </a:r>
@@ -3896,13 +3935,14 @@
           <a:lstStyle xmlns:a="http://schemas.openxmlformats.org/drawingml/2006/main"/>
           <a:p xmlns:a="http://schemas.openxmlformats.org/drawingml/2006/main">
             <a:pPr algn="l">
+              <a:buNone/>
               <a:defRPr sz="1425" b="0">
                 <a:solidFill>
                   <a:srgbClr val="59616C"/>
                 </a:solidFill>
-                <a:latin typeface="PingFang SC"/>
-                <a:ea typeface="PingFang SC"/>
-                <a:cs typeface="PingFang SC"/>
+                <a:latin typeface="Alibaba PuHuiTi"/>
+                <a:ea typeface="Alibaba PuHuiTi"/>
+                <a:cs typeface="Alibaba PuHuiTi"/>
               </a:defRPr>
             </a:pPr>
             <a:r>
@@ -3910,9 +3950,9 @@
                 <a:solidFill>
                   <a:srgbClr val="59616C"/>
                 </a:solidFill>
-                <a:latin typeface="PingFang SC"/>
-                <a:ea typeface="PingFang SC"/>
-                <a:cs typeface="PingFang SC"/>
+                <a:latin typeface="Alibaba PuHuiTi"/>
+                <a:ea typeface="Alibaba PuHuiTi"/>
+                <a:cs typeface="Alibaba PuHuiTi"/>
               </a:rPr>
               <a:t>把文件放进项目，coding agent 就能按这套设计规则生成 UI。</a:t>
             </a:r>
@@ -3985,13 +4025,14 @@
           <a:lstStyle xmlns:a="http://schemas.openxmlformats.org/drawingml/2006/main"/>
           <a:p xmlns:a="http://schemas.openxmlformats.org/drawingml/2006/main">
             <a:pPr algn="l">
+              <a:buNone/>
               <a:defRPr sz="1875" b="1">
                 <a:solidFill>
                   <a:srgbClr val="101216"/>
                 </a:solidFill>
-                <a:latin typeface="PingFang SC"/>
-                <a:ea typeface="PingFang SC"/>
-                <a:cs typeface="PingFang SC"/>
+                <a:latin typeface="Alibaba PuHuiTi"/>
+                <a:ea typeface="Alibaba PuHuiTi"/>
+                <a:cs typeface="Alibaba PuHuiTi"/>
               </a:defRPr>
             </a:pPr>
             <a:r>
@@ -3999,9 +4040,9 @@
                 <a:solidFill>
                   <a:srgbClr val="101216"/>
                 </a:solidFill>
-                <a:latin typeface="PingFang SC"/>
-                <a:ea typeface="PingFang SC"/>
-                <a:cs typeface="PingFang SC"/>
+                <a:latin typeface="Alibaba PuHuiTi"/>
+                <a:ea typeface="Alibaba PuHuiTi"/>
+                <a:cs typeface="Alibaba PuHuiTi"/>
               </a:rPr>
               <a:t>awesome-gpt-image-2</a:t>
             </a:r>
@@ -4041,13 +4082,14 @@
           <a:lstStyle xmlns:a="http://schemas.openxmlformats.org/drawingml/2006/main"/>
           <a:p xmlns:a="http://schemas.openxmlformats.org/drawingml/2006/main">
             <a:pPr algn="l">
+              <a:buNone/>
               <a:defRPr sz="1125" b="0">
                 <a:solidFill>
                   <a:srgbClr val="59616C"/>
                 </a:solidFill>
-                <a:latin typeface="PingFang SC"/>
-                <a:ea typeface="PingFang SC"/>
-                <a:cs typeface="PingFang SC"/>
+                <a:latin typeface="Alibaba PuHuiTi"/>
+                <a:ea typeface="Alibaba PuHuiTi"/>
+                <a:cs typeface="Alibaba PuHuiTi"/>
               </a:defRPr>
             </a:pPr>
             <a:r>
@@ -4055,9 +4097,9 @@
                 <a:solidFill>
                   <a:srgbClr val="59616C"/>
                 </a:solidFill>
-                <a:latin typeface="PingFang SC"/>
-                <a:ea typeface="PingFang SC"/>
-                <a:cs typeface="PingFang SC"/>
+                <a:latin typeface="Alibaba PuHuiTi"/>
+                <a:ea typeface="Alibaba PuHuiTi"/>
+                <a:cs typeface="Alibaba PuHuiTi"/>
               </a:rPr>
               <a:t>freestylefly</a:t>
             </a:r>
@@ -4097,13 +4139,14 @@
           <a:lstStyle xmlns:a="http://schemas.openxmlformats.org/drawingml/2006/main"/>
           <a:p xmlns:a="http://schemas.openxmlformats.org/drawingml/2006/main">
             <a:pPr algn="l">
+              <a:buNone/>
               <a:defRPr sz="1275" b="1">
                 <a:solidFill>
                   <a:srgbClr val="C85A3A"/>
                 </a:solidFill>
-                <a:latin typeface="PingFang SC"/>
-                <a:ea typeface="PingFang SC"/>
-                <a:cs typeface="PingFang SC"/>
+                <a:latin typeface="Alibaba PuHuiTi"/>
+                <a:ea typeface="Alibaba PuHuiTi"/>
+                <a:cs typeface="Alibaba PuHuiTi"/>
               </a:defRPr>
             </a:pPr>
             <a:r>
@@ -4111,9 +4154,9 @@
                 <a:solidFill>
                   <a:srgbClr val="C85A3A"/>
                 </a:solidFill>
-                <a:latin typeface="PingFang SC"/>
-                <a:ea typeface="PingFang SC"/>
-                <a:cs typeface="PingFang SC"/>
+                <a:latin typeface="Alibaba PuHuiTi"/>
+                <a:ea typeface="Alibaba PuHuiTi"/>
+                <a:cs typeface="Alibaba PuHuiTi"/>
               </a:rPr>
               <a:t>生图方法库</a:t>
             </a:r>
@@ -4153,13 +4196,14 @@
           <a:lstStyle xmlns:a="http://schemas.openxmlformats.org/drawingml/2006/main"/>
           <a:p xmlns:a="http://schemas.openxmlformats.org/drawingml/2006/main">
             <a:pPr algn="l">
+              <a:buNone/>
               <a:defRPr sz="1650" b="0">
                 <a:solidFill>
                   <a:srgbClr val="101216"/>
                 </a:solidFill>
-                <a:latin typeface="PingFang SC"/>
-                <a:ea typeface="PingFang SC"/>
-                <a:cs typeface="PingFang SC"/>
+                <a:latin typeface="Alibaba PuHuiTi"/>
+                <a:ea typeface="Alibaba PuHuiTi"/>
+                <a:cs typeface="Alibaba PuHuiTi"/>
               </a:defRPr>
             </a:pPr>
             <a:r>
@@ -4167,9 +4211,9 @@
                 <a:solidFill>
                   <a:srgbClr val="101216"/>
                 </a:solidFill>
-                <a:latin typeface="PingFang SC"/>
-                <a:ea typeface="PingFang SC"/>
-                <a:cs typeface="PingFang SC"/>
+                <a:latin typeface="Alibaba PuHuiTi"/>
+                <a:ea typeface="Alibaba PuHuiTi"/>
+                <a:cs typeface="Alibaba PuHuiTi"/>
               </a:rPr>
               <a:t>它把生图案例、模板和 style library 放在一起，并把常用做法提炼成 skill。</a:t>
             </a:r>
@@ -4209,13 +4253,14 @@
           <a:lstStyle xmlns:a="http://schemas.openxmlformats.org/drawingml/2006/main"/>
           <a:p xmlns:a="http://schemas.openxmlformats.org/drawingml/2006/main">
             <a:pPr algn="l">
+              <a:buNone/>
               <a:defRPr sz="1425" b="0">
                 <a:solidFill>
                   <a:srgbClr val="59616C"/>
                 </a:solidFill>
-                <a:latin typeface="PingFang SC"/>
-                <a:ea typeface="PingFang SC"/>
-                <a:cs typeface="PingFang SC"/>
+                <a:latin typeface="Alibaba PuHuiTi"/>
+                <a:ea typeface="Alibaba PuHuiTi"/>
+                <a:cs typeface="Alibaba PuHuiTi"/>
               </a:defRPr>
             </a:pPr>
             <a:r>
@@ -4223,9 +4268,9 @@
                 <a:solidFill>
                   <a:srgbClr val="59616C"/>
                 </a:solidFill>
-                <a:latin typeface="PingFang SC"/>
-                <a:ea typeface="PingFang SC"/>
-                <a:cs typeface="PingFang SC"/>
+                <a:latin typeface="Alibaba PuHuiTi"/>
+                <a:ea typeface="Alibaba PuHuiTi"/>
+                <a:cs typeface="Alibaba PuHuiTi"/>
               </a:rPr>
               <a:t>人可以看案例，agent 也可以直接复用模板和操作步骤。</a:t>
             </a:r>
@@ -4294,13 +4339,14 @@
           <a:lstStyle xmlns:a="http://schemas.openxmlformats.org/drawingml/2006/main"/>
           <a:p xmlns:a="http://schemas.openxmlformats.org/drawingml/2006/main">
             <a:pPr algn="l">
+              <a:buNone/>
               <a:defRPr sz="3150" b="1">
                 <a:solidFill>
                   <a:srgbClr val="101216"/>
                 </a:solidFill>
-                <a:latin typeface="PingFang SC"/>
-                <a:ea typeface="PingFang SC"/>
-                <a:cs typeface="PingFang SC"/>
+                <a:latin typeface="Alibaba PuHuiTi"/>
+                <a:ea typeface="Alibaba PuHuiTi"/>
+                <a:cs typeface="Alibaba PuHuiTi"/>
               </a:defRPr>
             </a:pPr>
             <a:r>
@@ -4308,9 +4354,9 @@
                 <a:solidFill>
                   <a:srgbClr val="101216"/>
                 </a:solidFill>
-                <a:latin typeface="PingFang SC"/>
-                <a:ea typeface="PingFang SC"/>
-                <a:cs typeface="PingFang SC"/>
+                <a:latin typeface="Alibaba PuHuiTi"/>
+                <a:ea typeface="Alibaba PuHuiTi"/>
+                <a:cs typeface="Alibaba PuHuiTi"/>
               </a:rPr>
               <a:t>更进一步，仓库开始规定 agent 怎么工作</a:t>
             </a:r>
@@ -4350,13 +4396,14 @@
           <a:lstStyle xmlns:a="http://schemas.openxmlformats.org/drawingml/2006/main"/>
           <a:p xmlns:a="http://schemas.openxmlformats.org/drawingml/2006/main">
             <a:pPr algn="l">
+              <a:buNone/>
               <a:defRPr sz="1575" b="0">
                 <a:solidFill>
                   <a:srgbClr val="59616C"/>
                 </a:solidFill>
-                <a:latin typeface="PingFang SC"/>
-                <a:ea typeface="PingFang SC"/>
-                <a:cs typeface="PingFang SC"/>
+                <a:latin typeface="Alibaba PuHuiTi"/>
+                <a:ea typeface="Alibaba PuHuiTi"/>
+                <a:cs typeface="Alibaba PuHuiTi"/>
               </a:defRPr>
             </a:pPr>
             <a:r>
@@ -4364,9 +4411,9 @@
                 <a:solidFill>
                   <a:srgbClr val="59616C"/>
                 </a:solidFill>
-                <a:latin typeface="PingFang SC"/>
-                <a:ea typeface="PingFang SC"/>
-                <a:cs typeface="PingFang SC"/>
+                <a:latin typeface="Alibaba PuHuiTi"/>
+                <a:ea typeface="Alibaba PuHuiTi"/>
+                <a:cs typeface="Alibaba PuHuiTi"/>
               </a:rPr>
               <a:t>安装器解决“怎么拿到”，方法库解决“拿到以后怎么做”。</a:t>
             </a:r>
@@ -4439,13 +4486,14 @@
           <a:lstStyle xmlns:a="http://schemas.openxmlformats.org/drawingml/2006/main"/>
           <a:p xmlns:a="http://schemas.openxmlformats.org/drawingml/2006/main">
             <a:pPr algn="l">
+              <a:buNone/>
               <a:defRPr sz="1875" b="1">
                 <a:solidFill>
                   <a:srgbClr val="101216"/>
                 </a:solidFill>
-                <a:latin typeface="PingFang SC"/>
-                <a:ea typeface="PingFang SC"/>
-                <a:cs typeface="PingFang SC"/>
+                <a:latin typeface="Alibaba PuHuiTi"/>
+                <a:ea typeface="Alibaba PuHuiTi"/>
+                <a:cs typeface="Alibaba PuHuiTi"/>
               </a:defRPr>
             </a:pPr>
             <a:r>
@@ -4453,9 +4501,9 @@
                 <a:solidFill>
                   <a:srgbClr val="101216"/>
                 </a:solidFill>
-                <a:latin typeface="PingFang SC"/>
-                <a:ea typeface="PingFang SC"/>
-                <a:cs typeface="PingFang SC"/>
+                <a:latin typeface="Alibaba PuHuiTi"/>
+                <a:ea typeface="Alibaba PuHuiTi"/>
+                <a:cs typeface="Alibaba PuHuiTi"/>
               </a:rPr>
               <a:t>skills</a:t>
             </a:r>
@@ -4495,13 +4543,14 @@
           <a:lstStyle xmlns:a="http://schemas.openxmlformats.org/drawingml/2006/main"/>
           <a:p xmlns:a="http://schemas.openxmlformats.org/drawingml/2006/main">
             <a:pPr algn="l">
+              <a:buNone/>
               <a:defRPr sz="1125" b="0">
                 <a:solidFill>
                   <a:srgbClr val="59616C"/>
                 </a:solidFill>
-                <a:latin typeface="PingFang SC"/>
-                <a:ea typeface="PingFang SC"/>
-                <a:cs typeface="PingFang SC"/>
+                <a:latin typeface="Alibaba PuHuiTi"/>
+                <a:ea typeface="Alibaba PuHuiTi"/>
+                <a:cs typeface="Alibaba PuHuiTi"/>
               </a:defRPr>
             </a:pPr>
             <a:r>
@@ -4509,9 +4558,9 @@
                 <a:solidFill>
                   <a:srgbClr val="59616C"/>
                 </a:solidFill>
-                <a:latin typeface="PingFang SC"/>
-                <a:ea typeface="PingFang SC"/>
-                <a:cs typeface="PingFang SC"/>
+                <a:latin typeface="Alibaba PuHuiTi"/>
+                <a:ea typeface="Alibaba PuHuiTi"/>
+                <a:cs typeface="Alibaba PuHuiTi"/>
               </a:rPr>
               <a:t>vercel-labs</a:t>
             </a:r>
@@ -4551,13 +4600,14 @@
           <a:lstStyle xmlns:a="http://schemas.openxmlformats.org/drawingml/2006/main"/>
           <a:p xmlns:a="http://schemas.openxmlformats.org/drawingml/2006/main">
             <a:pPr algn="l">
+              <a:buNone/>
               <a:defRPr sz="1275" b="1">
                 <a:solidFill>
                   <a:srgbClr val="C85A3A"/>
                 </a:solidFill>
-                <a:latin typeface="PingFang SC"/>
-                <a:ea typeface="PingFang SC"/>
-                <a:cs typeface="PingFang SC"/>
+                <a:latin typeface="Alibaba PuHuiTi"/>
+                <a:ea typeface="Alibaba PuHuiTi"/>
+                <a:cs typeface="Alibaba PuHuiTi"/>
               </a:defRPr>
             </a:pPr>
             <a:r>
@@ -4565,9 +4615,9 @@
                 <a:solidFill>
                   <a:srgbClr val="C85A3A"/>
                 </a:solidFill>
-                <a:latin typeface="PingFang SC"/>
-                <a:ea typeface="PingFang SC"/>
-                <a:cs typeface="PingFang SC"/>
+                <a:latin typeface="Alibaba PuHuiTi"/>
+                <a:ea typeface="Alibaba PuHuiTi"/>
+                <a:cs typeface="Alibaba PuHuiTi"/>
               </a:rPr>
               <a:t>Skill 安装器</a:t>
             </a:r>
@@ -4607,13 +4657,14 @@
           <a:lstStyle xmlns:a="http://schemas.openxmlformats.org/drawingml/2006/main"/>
           <a:p xmlns:a="http://schemas.openxmlformats.org/drawingml/2006/main">
             <a:pPr algn="l">
+              <a:buNone/>
               <a:defRPr sz="1650" b="0">
                 <a:solidFill>
                   <a:srgbClr val="101216"/>
                 </a:solidFill>
-                <a:latin typeface="PingFang SC"/>
-                <a:ea typeface="PingFang SC"/>
-                <a:cs typeface="PingFang SC"/>
+                <a:latin typeface="Alibaba PuHuiTi"/>
+                <a:ea typeface="Alibaba PuHuiTi"/>
+                <a:cs typeface="Alibaba PuHuiTi"/>
               </a:defRPr>
             </a:pPr>
             <a:r>
@@ -4621,9 +4672,9 @@
                 <a:solidFill>
                   <a:srgbClr val="101216"/>
                 </a:solidFill>
-                <a:latin typeface="PingFang SC"/>
-                <a:ea typeface="PingFang SC"/>
-                <a:cs typeface="PingFang SC"/>
+                <a:latin typeface="Alibaba PuHuiTi"/>
+                <a:ea typeface="Alibaba PuHuiTi"/>
+                <a:cs typeface="Alibaba PuHuiTi"/>
               </a:rPr>
               <a:t>它既是 skill 目录，也是命令行工具。npx skills 可以搜索、安装或运行 skill。</a:t>
             </a:r>
@@ -4663,13 +4714,14 @@
           <a:lstStyle xmlns:a="http://schemas.openxmlformats.org/drawingml/2006/main"/>
           <a:p xmlns:a="http://schemas.openxmlformats.org/drawingml/2006/main">
             <a:pPr algn="l">
+              <a:buNone/>
               <a:defRPr sz="1425" b="0">
                 <a:solidFill>
                   <a:srgbClr val="59616C"/>
                 </a:solidFill>
-                <a:latin typeface="PingFang SC"/>
-                <a:ea typeface="PingFang SC"/>
-                <a:cs typeface="PingFang SC"/>
+                <a:latin typeface="Alibaba PuHuiTi"/>
+                <a:ea typeface="Alibaba PuHuiTi"/>
+                <a:cs typeface="Alibaba PuHuiTi"/>
               </a:defRPr>
             </a:pPr>
             <a:r>
@@ -4677,9 +4729,9 @@
                 <a:solidFill>
                   <a:srgbClr val="59616C"/>
                 </a:solidFill>
-                <a:latin typeface="PingFang SC"/>
-                <a:ea typeface="PingFang SC"/>
-                <a:cs typeface="PingFang SC"/>
+                <a:latin typeface="Alibaba PuHuiTi"/>
+                <a:ea typeface="Alibaba PuHuiTi"/>
+                <a:cs typeface="Alibaba PuHuiTi"/>
               </a:rPr>
               <a:t>清单开始有包管理器的感觉：找到以后，下一步可以交给工具完成。</a:t>
             </a:r>
@@ -4752,13 +4804,14 @@
           <a:lstStyle xmlns:a="http://schemas.openxmlformats.org/drawingml/2006/main"/>
           <a:p xmlns:a="http://schemas.openxmlformats.org/drawingml/2006/main">
             <a:pPr algn="l">
+              <a:buNone/>
               <a:defRPr sz="1875" b="1">
                 <a:solidFill>
                   <a:srgbClr val="101216"/>
                 </a:solidFill>
-                <a:latin typeface="PingFang SC"/>
-                <a:ea typeface="PingFang SC"/>
-                <a:cs typeface="PingFang SC"/>
+                <a:latin typeface="Alibaba PuHuiTi"/>
+                <a:ea typeface="Alibaba PuHuiTi"/>
+                <a:cs typeface="Alibaba PuHuiTi"/>
               </a:defRPr>
             </a:pPr>
             <a:r>
@@ -4766,9 +4819,9 @@
                 <a:solidFill>
                   <a:srgbClr val="101216"/>
                 </a:solidFill>
-                <a:latin typeface="PingFang SC"/>
-                <a:ea typeface="PingFang SC"/>
-                <a:cs typeface="PingFang SC"/>
+                <a:latin typeface="Alibaba PuHuiTi"/>
+                <a:ea typeface="Alibaba PuHuiTi"/>
+                <a:cs typeface="Alibaba PuHuiTi"/>
               </a:rPr>
               <a:t>skills</a:t>
             </a:r>
@@ -4808,13 +4861,14 @@
           <a:lstStyle xmlns:a="http://schemas.openxmlformats.org/drawingml/2006/main"/>
           <a:p xmlns:a="http://schemas.openxmlformats.org/drawingml/2006/main">
             <a:pPr algn="l">
+              <a:buNone/>
               <a:defRPr sz="1125" b="0">
                 <a:solidFill>
                   <a:srgbClr val="59616C"/>
                 </a:solidFill>
-                <a:latin typeface="PingFang SC"/>
-                <a:ea typeface="PingFang SC"/>
-                <a:cs typeface="PingFang SC"/>
+                <a:latin typeface="Alibaba PuHuiTi"/>
+                <a:ea typeface="Alibaba PuHuiTi"/>
+                <a:cs typeface="Alibaba PuHuiTi"/>
               </a:defRPr>
             </a:pPr>
             <a:r>
@@ -4822,9 +4876,9 @@
                 <a:solidFill>
                   <a:srgbClr val="59616C"/>
                 </a:solidFill>
-                <a:latin typeface="PingFang SC"/>
-                <a:ea typeface="PingFang SC"/>
-                <a:cs typeface="PingFang SC"/>
+                <a:latin typeface="Alibaba PuHuiTi"/>
+                <a:ea typeface="Alibaba PuHuiTi"/>
+                <a:cs typeface="Alibaba PuHuiTi"/>
               </a:rPr>
               <a:t>anthropics</a:t>
             </a:r>
@@ -4864,13 +4918,14 @@
           <a:lstStyle xmlns:a="http://schemas.openxmlformats.org/drawingml/2006/main"/>
           <a:p xmlns:a="http://schemas.openxmlformats.org/drawingml/2006/main">
             <a:pPr algn="l">
+              <a:buNone/>
               <a:defRPr sz="1275" b="1">
                 <a:solidFill>
                   <a:srgbClr val="C85A3A"/>
                 </a:solidFill>
-                <a:latin typeface="PingFang SC"/>
-                <a:ea typeface="PingFang SC"/>
-                <a:cs typeface="PingFang SC"/>
+                <a:latin typeface="Alibaba PuHuiTi"/>
+                <a:ea typeface="Alibaba PuHuiTi"/>
+                <a:cs typeface="Alibaba PuHuiTi"/>
               </a:defRPr>
             </a:pPr>
             <a:r>
@@ -4878,9 +4933,9 @@
                 <a:solidFill>
                   <a:srgbClr val="C85A3A"/>
                 </a:solidFill>
-                <a:latin typeface="PingFang SC"/>
-                <a:ea typeface="PingFang SC"/>
-                <a:cs typeface="PingFang SC"/>
+                <a:latin typeface="Alibaba PuHuiTi"/>
+                <a:ea typeface="Alibaba PuHuiTi"/>
+                <a:cs typeface="Alibaba PuHuiTi"/>
               </a:rPr>
               <a:t>官方 Skill 范本</a:t>
             </a:r>
@@ -4920,13 +4975,14 @@
           <a:lstStyle xmlns:a="http://schemas.openxmlformats.org/drawingml/2006/main"/>
           <a:p xmlns:a="http://schemas.openxmlformats.org/drawingml/2006/main">
             <a:pPr algn="l">
+              <a:buNone/>
               <a:defRPr sz="1650" b="0">
                 <a:solidFill>
                   <a:srgbClr val="101216"/>
                 </a:solidFill>
-                <a:latin typeface="PingFang SC"/>
-                <a:ea typeface="PingFang SC"/>
-                <a:cs typeface="PingFang SC"/>
+                <a:latin typeface="Alibaba PuHuiTi"/>
+                <a:ea typeface="Alibaba PuHuiTi"/>
+                <a:cs typeface="Alibaba PuHuiTi"/>
               </a:defRPr>
             </a:pPr>
             <a:r>
@@ -4934,9 +4990,9 @@
                 <a:solidFill>
                   <a:srgbClr val="101216"/>
                 </a:solidFill>
-                <a:latin typeface="PingFang SC"/>
-                <a:ea typeface="PingFang SC"/>
-                <a:cs typeface="PingFang SC"/>
+                <a:latin typeface="Alibaba PuHuiTi"/>
+                <a:ea typeface="Alibaba PuHuiTi"/>
+                <a:cs typeface="Alibaba PuHuiTi"/>
               </a:rPr>
               <a:t>它给出公开的 Agent Skills 样例。每项能力都是一个包含说明、脚本和资源的文件夹。</a:t>
             </a:r>
@@ -4976,13 +5032,14 @@
           <a:lstStyle xmlns:a="http://schemas.openxmlformats.org/drawingml/2006/main"/>
           <a:p xmlns:a="http://schemas.openxmlformats.org/drawingml/2006/main">
             <a:pPr algn="l">
+              <a:buNone/>
               <a:defRPr sz="1425" b="0">
                 <a:solidFill>
                   <a:srgbClr val="59616C"/>
                 </a:solidFill>
-                <a:latin typeface="PingFang SC"/>
-                <a:ea typeface="PingFang SC"/>
-                <a:cs typeface="PingFang SC"/>
+                <a:latin typeface="Alibaba PuHuiTi"/>
+                <a:ea typeface="Alibaba PuHuiTi"/>
+                <a:cs typeface="Alibaba PuHuiTi"/>
               </a:defRPr>
             </a:pPr>
             <a:r>
@@ -4990,9 +5047,9 @@
                 <a:solidFill>
                   <a:srgbClr val="59616C"/>
                 </a:solidFill>
-                <a:latin typeface="PingFang SC"/>
-                <a:ea typeface="PingFang SC"/>
-                <a:cs typeface="PingFang SC"/>
+                <a:latin typeface="Alibaba PuHuiTi"/>
+                <a:ea typeface="Alibaba PuHuiTi"/>
+                <a:cs typeface="Alibaba PuHuiTi"/>
               </a:rPr>
               <a:t>这里最有价值的是文件结构：agent 知道先读什么、再执行什么。</a:t>
             </a:r>
@@ -5065,13 +5122,14 @@
           <a:lstStyle xmlns:a="http://schemas.openxmlformats.org/drawingml/2006/main"/>
           <a:p xmlns:a="http://schemas.openxmlformats.org/drawingml/2006/main">
             <a:pPr algn="l">
+              <a:buNone/>
               <a:defRPr sz="1875" b="1">
                 <a:solidFill>
                   <a:srgbClr val="101216"/>
                 </a:solidFill>
-                <a:latin typeface="PingFang SC"/>
-                <a:ea typeface="PingFang SC"/>
-                <a:cs typeface="PingFang SC"/>
+                <a:latin typeface="Alibaba PuHuiTi"/>
+                <a:ea typeface="Alibaba PuHuiTi"/>
+                <a:cs typeface="Alibaba PuHuiTi"/>
               </a:defRPr>
             </a:pPr>
             <a:r>
@@ -5079,9 +5137,9 @@
                 <a:solidFill>
                   <a:srgbClr val="101216"/>
                 </a:solidFill>
-                <a:latin typeface="PingFang SC"/>
-                <a:ea typeface="PingFang SC"/>
-                <a:cs typeface="PingFang SC"/>
+                <a:latin typeface="Alibaba PuHuiTi"/>
+                <a:ea typeface="Alibaba PuHuiTi"/>
+                <a:cs typeface="Alibaba PuHuiTi"/>
               </a:rPr>
               <a:t>superpowers</a:t>
             </a:r>
@@ -5121,13 +5179,14 @@
           <a:lstStyle xmlns:a="http://schemas.openxmlformats.org/drawingml/2006/main"/>
           <a:p xmlns:a="http://schemas.openxmlformats.org/drawingml/2006/main">
             <a:pPr algn="l">
+              <a:buNone/>
               <a:defRPr sz="1125" b="0">
                 <a:solidFill>
                   <a:srgbClr val="59616C"/>
                 </a:solidFill>
-                <a:latin typeface="PingFang SC"/>
-                <a:ea typeface="PingFang SC"/>
-                <a:cs typeface="PingFang SC"/>
+                <a:latin typeface="Alibaba PuHuiTi"/>
+                <a:ea typeface="Alibaba PuHuiTi"/>
+                <a:cs typeface="Alibaba PuHuiTi"/>
               </a:defRPr>
             </a:pPr>
             <a:r>
@@ -5135,9 +5194,9 @@
                 <a:solidFill>
                   <a:srgbClr val="59616C"/>
                 </a:solidFill>
-                <a:latin typeface="PingFang SC"/>
-                <a:ea typeface="PingFang SC"/>
-                <a:cs typeface="PingFang SC"/>
+                <a:latin typeface="Alibaba PuHuiTi"/>
+                <a:ea typeface="Alibaba PuHuiTi"/>
+                <a:cs typeface="Alibaba PuHuiTi"/>
               </a:rPr>
               <a:t>obra</a:t>
             </a:r>
@@ -5177,13 +5236,14 @@
           <a:lstStyle xmlns:a="http://schemas.openxmlformats.org/drawingml/2006/main"/>
           <a:p xmlns:a="http://schemas.openxmlformats.org/drawingml/2006/main">
             <a:pPr algn="l">
+              <a:buNone/>
               <a:defRPr sz="1275" b="1">
                 <a:solidFill>
                   <a:srgbClr val="C85A3A"/>
                 </a:solidFill>
-                <a:latin typeface="PingFang SC"/>
-                <a:ea typeface="PingFang SC"/>
-                <a:cs typeface="PingFang SC"/>
+                <a:latin typeface="Alibaba PuHuiTi"/>
+                <a:ea typeface="Alibaba PuHuiTi"/>
+                <a:cs typeface="Alibaba PuHuiTi"/>
               </a:defRPr>
             </a:pPr>
             <a:r>
@@ -5191,9 +5251,9 @@
                 <a:solidFill>
                   <a:srgbClr val="C85A3A"/>
                 </a:solidFill>
-                <a:latin typeface="PingFang SC"/>
-                <a:ea typeface="PingFang SC"/>
-                <a:cs typeface="PingFang SC"/>
+                <a:latin typeface="Alibaba PuHuiTi"/>
+                <a:ea typeface="Alibaba PuHuiTi"/>
+                <a:cs typeface="Alibaba PuHuiTi"/>
               </a:rPr>
               <a:t>开发方法</a:t>
             </a:r>
@@ -5233,13 +5293,14 @@
           <a:lstStyle xmlns:a="http://schemas.openxmlformats.org/drawingml/2006/main"/>
           <a:p xmlns:a="http://schemas.openxmlformats.org/drawingml/2006/main">
             <a:pPr algn="l">
+              <a:buNone/>
               <a:defRPr sz="1650" b="0">
                 <a:solidFill>
                   <a:srgbClr val="101216"/>
                 </a:solidFill>
-                <a:latin typeface="PingFang SC"/>
-                <a:ea typeface="PingFang SC"/>
-                <a:cs typeface="PingFang SC"/>
+                <a:latin typeface="Alibaba PuHuiTi"/>
+                <a:ea typeface="Alibaba PuHuiTi"/>
+                <a:cs typeface="Alibaba PuHuiTi"/>
               </a:defRPr>
             </a:pPr>
             <a:r>
@@ -5247,9 +5308,9 @@
                 <a:solidFill>
                   <a:srgbClr val="101216"/>
                 </a:solidFill>
-                <a:latin typeface="PingFang SC"/>
-                <a:ea typeface="PingFang SC"/>
-                <a:cs typeface="PingFang SC"/>
+                <a:latin typeface="Alibaba PuHuiTi"/>
+                <a:ea typeface="Alibaba PuHuiTi"/>
+                <a:cs typeface="Alibaba PuHuiTi"/>
               </a:rPr>
               <a:t>它把需求澄清、写计划、TDD 和代码评审整理成会自动触发的 skills。</a:t>
             </a:r>
@@ -5289,13 +5350,14 @@
           <a:lstStyle xmlns:a="http://schemas.openxmlformats.org/drawingml/2006/main"/>
           <a:p xmlns:a="http://schemas.openxmlformats.org/drawingml/2006/main">
             <a:pPr algn="l">
+              <a:buNone/>
               <a:defRPr sz="1425" b="0">
                 <a:solidFill>
                   <a:srgbClr val="59616C"/>
                 </a:solidFill>
-                <a:latin typeface="PingFang SC"/>
-                <a:ea typeface="PingFang SC"/>
-                <a:cs typeface="PingFang SC"/>
+                <a:latin typeface="Alibaba PuHuiTi"/>
+                <a:ea typeface="Alibaba PuHuiTi"/>
+                <a:cs typeface="Alibaba PuHuiTi"/>
               </a:defRPr>
             </a:pPr>
             <a:r>
@@ -5303,9 +5365,9 @@
                 <a:solidFill>
                   <a:srgbClr val="59616C"/>
                 </a:solidFill>
-                <a:latin typeface="PingFang SC"/>
-                <a:ea typeface="PingFang SC"/>
-                <a:cs typeface="PingFang SC"/>
+                <a:latin typeface="Alibaba PuHuiTi"/>
+                <a:ea typeface="Alibaba PuHuiTi"/>
+                <a:cs typeface="Alibaba PuHuiTi"/>
               </a:rPr>
               <a:t>仓库交付的不是代码片段，而是一套 coding agent 的工作纪律。</a:t>
             </a:r>
@@ -5378,13 +5440,14 @@
           <a:lstStyle xmlns:a="http://schemas.openxmlformats.org/drawingml/2006/main"/>
           <a:p xmlns:a="http://schemas.openxmlformats.org/drawingml/2006/main">
             <a:pPr algn="l">
+              <a:buNone/>
               <a:defRPr sz="1875" b="1">
                 <a:solidFill>
                   <a:srgbClr val="101216"/>
                 </a:solidFill>
-                <a:latin typeface="PingFang SC"/>
-                <a:ea typeface="PingFang SC"/>
-                <a:cs typeface="PingFang SC"/>
+                <a:latin typeface="Alibaba PuHuiTi"/>
+                <a:ea typeface="Alibaba PuHuiTi"/>
+                <a:cs typeface="Alibaba PuHuiTi"/>
               </a:defRPr>
             </a:pPr>
             <a:r>
@@ -5392,9 +5455,9 @@
                 <a:solidFill>
                   <a:srgbClr val="101216"/>
                 </a:solidFill>
-                <a:latin typeface="PingFang SC"/>
-                <a:ea typeface="PingFang SC"/>
-                <a:cs typeface="PingFang SC"/>
+                <a:latin typeface="Alibaba PuHuiTi"/>
+                <a:ea typeface="Alibaba PuHuiTi"/>
+                <a:cs typeface="Alibaba PuHuiTi"/>
               </a:rPr>
               <a:t>spec-kit</a:t>
             </a:r>
@@ -5434,13 +5497,14 @@
           <a:lstStyle xmlns:a="http://schemas.openxmlformats.org/drawingml/2006/main"/>
           <a:p xmlns:a="http://schemas.openxmlformats.org/drawingml/2006/main">
             <a:pPr algn="l">
+              <a:buNone/>
               <a:defRPr sz="1125" b="0">
                 <a:solidFill>
                   <a:srgbClr val="59616C"/>
                 </a:solidFill>
-                <a:latin typeface="PingFang SC"/>
-                <a:ea typeface="PingFang SC"/>
-                <a:cs typeface="PingFang SC"/>
+                <a:latin typeface="Alibaba PuHuiTi"/>
+                <a:ea typeface="Alibaba PuHuiTi"/>
+                <a:cs typeface="Alibaba PuHuiTi"/>
               </a:defRPr>
             </a:pPr>
             <a:r>
@@ -5448,9 +5512,9 @@
                 <a:solidFill>
                   <a:srgbClr val="59616C"/>
                 </a:solidFill>
-                <a:latin typeface="PingFang SC"/>
-                <a:ea typeface="PingFang SC"/>
-                <a:cs typeface="PingFang SC"/>
+                <a:latin typeface="Alibaba PuHuiTi"/>
+                <a:ea typeface="Alibaba PuHuiTi"/>
+                <a:cs typeface="Alibaba PuHuiTi"/>
               </a:rPr>
               <a:t>github</a:t>
             </a:r>
@@ -5490,13 +5554,14 @@
           <a:lstStyle xmlns:a="http://schemas.openxmlformats.org/drawingml/2006/main"/>
           <a:p xmlns:a="http://schemas.openxmlformats.org/drawingml/2006/main">
             <a:pPr algn="l">
+              <a:buNone/>
               <a:defRPr sz="1275" b="1">
                 <a:solidFill>
                   <a:srgbClr val="C85A3A"/>
                 </a:solidFill>
-                <a:latin typeface="PingFang SC"/>
-                <a:ea typeface="PingFang SC"/>
-                <a:cs typeface="PingFang SC"/>
+                <a:latin typeface="Alibaba PuHuiTi"/>
+                <a:ea typeface="Alibaba PuHuiTi"/>
+                <a:cs typeface="Alibaba PuHuiTi"/>
               </a:defRPr>
             </a:pPr>
             <a:r>
@@ -5504,9 +5569,9 @@
                 <a:solidFill>
                   <a:srgbClr val="C85A3A"/>
                 </a:solidFill>
-                <a:latin typeface="PingFang SC"/>
-                <a:ea typeface="PingFang SC"/>
-                <a:cs typeface="PingFang SC"/>
+                <a:latin typeface="Alibaba PuHuiTi"/>
+                <a:ea typeface="Alibaba PuHuiTi"/>
+                <a:cs typeface="Alibaba PuHuiTi"/>
               </a:rPr>
               <a:t>规格驱动开发</a:t>
             </a:r>
@@ -5546,13 +5611,14 @@
           <a:lstStyle xmlns:a="http://schemas.openxmlformats.org/drawingml/2006/main"/>
           <a:p xmlns:a="http://schemas.openxmlformats.org/drawingml/2006/main">
             <a:pPr algn="l">
+              <a:buNone/>
               <a:defRPr sz="1650" b="0">
                 <a:solidFill>
                   <a:srgbClr val="101216"/>
                 </a:solidFill>
-                <a:latin typeface="PingFang SC"/>
-                <a:ea typeface="PingFang SC"/>
-                <a:cs typeface="PingFang SC"/>
+                <a:latin typeface="Alibaba PuHuiTi"/>
+                <a:ea typeface="Alibaba PuHuiTi"/>
+                <a:cs typeface="Alibaba PuHuiTi"/>
               </a:defRPr>
             </a:pPr>
             <a:r>
@@ -5560,9 +5626,9 @@
                 <a:solidFill>
                   <a:srgbClr val="101216"/>
                 </a:solidFill>
-                <a:latin typeface="PingFang SC"/>
-                <a:ea typeface="PingFang SC"/>
-                <a:cs typeface="PingFang SC"/>
+                <a:latin typeface="Alibaba PuHuiTi"/>
+                <a:ea typeface="Alibaba PuHuiTi"/>
+                <a:cs typeface="Alibaba PuHuiTi"/>
               </a:rPr>
               <a:t>它先保存规格、计划和验收条件，再让 agent 开始写代码。</a:t>
             </a:r>
@@ -5602,13 +5668,14 @@
           <a:lstStyle xmlns:a="http://schemas.openxmlformats.org/drawingml/2006/main"/>
           <a:p xmlns:a="http://schemas.openxmlformats.org/drawingml/2006/main">
             <a:pPr algn="l">
+              <a:buNone/>
               <a:defRPr sz="1425" b="0">
                 <a:solidFill>
                   <a:srgbClr val="59616C"/>
                 </a:solidFill>
-                <a:latin typeface="PingFang SC"/>
-                <a:ea typeface="PingFang SC"/>
-                <a:cs typeface="PingFang SC"/>
+                <a:latin typeface="Alibaba PuHuiTi"/>
+                <a:ea typeface="Alibaba PuHuiTi"/>
+                <a:cs typeface="Alibaba PuHuiTi"/>
               </a:defRPr>
             </a:pPr>
             <a:r>
@@ -5616,9 +5683,9 @@
                 <a:solidFill>
                   <a:srgbClr val="59616C"/>
                 </a:solidFill>
-                <a:latin typeface="PingFang SC"/>
-                <a:ea typeface="PingFang SC"/>
-                <a:cs typeface="PingFang SC"/>
+                <a:latin typeface="Alibaba PuHuiTi"/>
+                <a:ea typeface="Alibaba PuHuiTi"/>
+                <a:cs typeface="Alibaba PuHuiTi"/>
               </a:rPr>
               <a:t>代码可以快速重写，真正需要长期保留的是意图和判断标准。</a:t>
             </a:r>
@@ -5678,14 +5745,14 @@
     </a:clrScheme>
     <a:fontScheme name="Office">
       <a:majorFont>
-        <a:latin typeface="Calibri Light"/>
-        <a:ea typeface="Calibri Light"/>
-        <a:cs typeface="Calibri Light"/>
+        <a:latin typeface="Alibaba PuHuiTi"/>
+        <a:ea typeface="Alibaba PuHuiTi"/>
+        <a:cs typeface="Alibaba PuHuiTi"/>
       </a:majorFont>
       <a:minorFont>
-        <a:latin typeface="Calibri"/>
-        <a:ea typeface="Calibri"/>
-        <a:cs typeface="Calibri"/>
+        <a:latin typeface="Alibaba PuHuiTi"/>
+        <a:ea typeface="Alibaba PuHuiTi"/>
+        <a:cs typeface="Alibaba PuHuiTi"/>
       </a:minorFont>
     </a:fontScheme>
     <a:fmtScheme name="ChatGPT">
